--- a/python/CourseDesign/Week07e/Week7_Lecture14_Efficient_Interpolation_Filter_Banks.pptx
+++ b/python/CourseDesign/Week07e/Week7_Lecture14_Efficient_Interpolation_Filter_Banks.pptx
@@ -4,6 +4,9 @@
   <p:sldMasterIdLst>
     <p:sldMasterId id="2147483648" r:id="rId1"/>
   </p:sldMasterIdLst>
+  <p:notesMasterIdLst>
+    <p:notesMasterId r:id="rId22"/>
+  </p:notesMasterIdLst>
   <p:sldIdLst>
     <p:sldId id="256" r:id="rId2"/>
     <p:sldId id="257" r:id="rId3"/>
@@ -13,21 +16,19 @@
     <p:sldId id="261" r:id="rId7"/>
     <p:sldId id="262" r:id="rId8"/>
     <p:sldId id="263" r:id="rId9"/>
-    <p:sldId id="264" r:id="rId10"/>
-    <p:sldId id="265" r:id="rId11"/>
-    <p:sldId id="266" r:id="rId12"/>
-    <p:sldId id="267" r:id="rId13"/>
-    <p:sldId id="268" r:id="rId14"/>
-    <p:sldId id="269" r:id="rId15"/>
-    <p:sldId id="270" r:id="rId16"/>
-    <p:sldId id="271" r:id="rId17"/>
-    <p:sldId id="272" r:id="rId18"/>
-    <p:sldId id="273" r:id="rId19"/>
-    <p:sldId id="274" r:id="rId20"/>
+    <p:sldId id="275" r:id="rId10"/>
+    <p:sldId id="264" r:id="rId11"/>
+    <p:sldId id="265" r:id="rId12"/>
+    <p:sldId id="266" r:id="rId13"/>
+    <p:sldId id="267" r:id="rId14"/>
+    <p:sldId id="268" r:id="rId15"/>
+    <p:sldId id="269" r:id="rId16"/>
+    <p:sldId id="270" r:id="rId17"/>
+    <p:sldId id="271" r:id="rId18"/>
+    <p:sldId id="272" r:id="rId19"/>
+    <p:sldId id="273" r:id="rId20"/>
+    <p:sldId id="274" r:id="rId21"/>
   </p:sldIdLst>
-  <p:notesMasterIdLst>
-    <p:notesMasterId r:id="rId21"/>
-  </p:notesMasterIdLst>
   <p:sldSz cx="12192000" cy="6858000"/>
   <p:notesSz cx="6858000" cy="12192000"/>
   <p:defaultTextStyle>
@@ -122,6 +123,11 @@
       </a:defRPr>
     </a:lvl9pPr>
   </p:defaultTextStyle>
+  <p:extLst>
+    <p:ext uri="{EFAFB233-063F-42B5-8137-9DF3F51BA10A}">
+      <p15:sldGuideLst xmlns:p15="http://schemas.microsoft.com/office/powerpoint/2012/main"/>
+    </p:ext>
+  </p:extLst>
 </p:presentation>
 </file>
 
@@ -147,234 +153,10 @@
           <a:chExt cx="0" cy="0"/>
         </a:xfrm>
       </p:grpSpPr>
-      <p:sp>
-        <p:nvSpPr>
-          <p:cNvPr id="2" name="Header Placeholder 1"/>
-          <p:cNvSpPr>
-            <a:spLocks noGrp="1"/>
-          </p:cNvSpPr>
-          <p:nvPr>
-            <p:ph type="hdr" sz="quarter"/>
-          </p:nvPr>
-        </p:nvSpPr>
-        <p:spPr>
-          <a:xfrm>
-            <a:off x="0" y="0"/>
-            <a:ext cx="2971800" cy="458788"/>
-          </a:xfrm>
-          <a:prstGeom prst="rect">
-            <a:avLst/>
-          </a:prstGeom>
-        </p:spPr>
-        <p:txBody>
-          <a:bodyPr vert="horz" lIns="91440" tIns="45720" rIns="91440" bIns="45720" rtlCol="0"/>
-          <a:lstStyle>
-            <a:lvl1pPr algn="l">
-              <a:defRPr sz="1200"/>
-            </a:lvl1pPr>
-          </a:lstStyle>
-          <a:p>
-            <a:endParaRPr lang="en-US"/>
-          </a:p>
-        </p:txBody>
-      </p:sp>
-      <p:sp>
-        <p:nvSpPr>
-          <p:cNvPr id="3" name="Date Placeholder 2"/>
-          <p:cNvSpPr>
-            <a:spLocks noGrp="1"/>
-          </p:cNvSpPr>
-          <p:nvPr>
-            <p:ph type="dt" idx="1"/>
-          </p:nvPr>
-        </p:nvSpPr>
-        <p:spPr>
-          <a:xfrm>
-            <a:off x="3884613" y="0"/>
-            <a:ext cx="2971800" cy="458788"/>
-          </a:xfrm>
-          <a:prstGeom prst="rect">
-            <a:avLst/>
-          </a:prstGeom>
-        </p:spPr>
-        <p:txBody>
-          <a:bodyPr vert="horz" lIns="91440" tIns="45720" rIns="91440" bIns="45720" rtlCol="0"/>
-          <a:lstStyle>
-            <a:lvl1pPr algn="r">
-              <a:defRPr sz="1200"/>
-            </a:lvl1pPr>
-          </a:lstStyle>
-          <a:p>
-            <a:fld id="{5282F153-3F37-0F45-9E97-73ACFA13230C}" type="datetimeFigureOut">
-              <a:rPr lang="en-US"/>
-              <a:t>7/23/19</a:t>
-            </a:fld>
-            <a:endParaRPr lang="en-US"/>
-          </a:p>
-        </p:txBody>
-      </p:sp>
-      <p:sp>
-        <p:nvSpPr>
-          <p:cNvPr id="4" name="Slide Image Placeholder 3"/>
-          <p:cNvSpPr>
-            <a:spLocks noGrp="1" noRot="1" noChangeAspect="1"/>
-          </p:cNvSpPr>
-          <p:nvPr>
-            <p:ph type="sldImg" idx="2"/>
-          </p:nvPr>
-        </p:nvSpPr>
-        <p:spPr>
-          <a:xfrm>
-            <a:off x="685800" y="1143000"/>
-            <a:ext cx="5486400" cy="3086100"/>
-          </a:xfrm>
-          <a:prstGeom prst="rect">
-            <a:avLst/>
-          </a:prstGeom>
-          <a:noFill/>
-          <a:ln w="12700">
-            <a:solidFill>
-              <a:prstClr val="black"/>
-            </a:solidFill>
-          </a:ln>
-        </p:spPr>
-        <p:txBody>
-          <a:bodyPr vert="horz" lIns="91440" tIns="45720" rIns="91440" bIns="45720" rtlCol="0" anchor="ctr"/>
-          <a:lstStyle/>
-          <a:p>
-            <a:endParaRPr lang="en-US"/>
-          </a:p>
-        </p:txBody>
-      </p:sp>
-      <p:sp>
-        <p:nvSpPr>
-          <p:cNvPr id="5" name="Notes Placeholder 4"/>
-          <p:cNvSpPr>
-            <a:spLocks noGrp="1"/>
-          </p:cNvSpPr>
-          <p:nvPr>
-            <p:ph type="body" sz="quarter" idx="3"/>
-          </p:nvPr>
-        </p:nvSpPr>
-        <p:spPr>
-          <a:xfrm>
-            <a:off x="685800" y="4400550"/>
-            <a:ext cx="5486400" cy="3600450"/>
-          </a:xfrm>
-          <a:prstGeom prst="rect">
-            <a:avLst/>
-          </a:prstGeom>
-        </p:spPr>
-        <p:txBody>
-          <a:bodyPr vert="horz" lIns="91440" tIns="45720" rIns="91440" bIns="45720" rtlCol="0"/>
-          <a:lstStyle/>
-          <a:p>
-            <a:pPr lvl="0"/>
-            <a:r>
-              <a:rPr lang="en-US"/>
-              <a:t>Click to edit Master text styles</a:t>
-            </a:r>
-          </a:p>
-          <a:p>
-            <a:pPr lvl="1"/>
-            <a:r>
-              <a:rPr lang="en-US"/>
-              <a:t>Second level</a:t>
-            </a:r>
-          </a:p>
-          <a:p>
-            <a:pPr lvl="2"/>
-            <a:r>
-              <a:rPr lang="en-US"/>
-              <a:t>Third level</a:t>
-            </a:r>
-          </a:p>
-          <a:p>
-            <a:pPr lvl="3"/>
-            <a:r>
-              <a:rPr lang="en-US"/>
-              <a:t>Fourth level</a:t>
-            </a:r>
-          </a:p>
-          <a:p>
-            <a:pPr lvl="4"/>
-            <a:r>
-              <a:rPr lang="en-US"/>
-              <a:t>Fifth level</a:t>
-            </a:r>
-          </a:p>
-        </p:txBody>
-      </p:sp>
-      <p:sp>
-        <p:nvSpPr>
-          <p:cNvPr id="6" name="Footer Placeholder 5"/>
-          <p:cNvSpPr>
-            <a:spLocks noGrp="1"/>
-          </p:cNvSpPr>
-          <p:nvPr>
-            <p:ph type="ftr" sz="quarter" idx="4"/>
-          </p:nvPr>
-        </p:nvSpPr>
-        <p:spPr>
-          <a:xfrm>
-            <a:off x="0" y="8685213"/>
-            <a:ext cx="2971800" cy="458787"/>
-          </a:xfrm>
-          <a:prstGeom prst="rect">
-            <a:avLst/>
-          </a:prstGeom>
-        </p:spPr>
-        <p:txBody>
-          <a:bodyPr vert="horz" lIns="91440" tIns="45720" rIns="91440" bIns="45720" rtlCol="0" anchor="b"/>
-          <a:lstStyle>
-            <a:lvl1pPr algn="l">
-              <a:defRPr sz="1200"/>
-            </a:lvl1pPr>
-          </a:lstStyle>
-          <a:p>
-            <a:endParaRPr lang="en-US"/>
-          </a:p>
-        </p:txBody>
-      </p:sp>
-      <p:sp>
-        <p:nvSpPr>
-          <p:cNvPr id="7" name="Slide Number Placeholder 6"/>
-          <p:cNvSpPr>
-            <a:spLocks noGrp="1"/>
-          </p:cNvSpPr>
-          <p:nvPr>
-            <p:ph type="sldNum" sz="quarter" idx="5"/>
-          </p:nvPr>
-        </p:nvSpPr>
-        <p:spPr>
-          <a:xfrm>
-            <a:off x="3884613" y="8685213"/>
-            <a:ext cx="2971800" cy="458787"/>
-          </a:xfrm>
-          <a:prstGeom prst="rect">
-            <a:avLst/>
-          </a:prstGeom>
-        </p:spPr>
-        <p:txBody>
-          <a:bodyPr vert="horz" lIns="91440" tIns="45720" rIns="91440" bIns="45720" rtlCol="0" anchor="b"/>
-          <a:lstStyle>
-            <a:lvl1pPr algn="r">
-              <a:defRPr sz="1200"/>
-            </a:lvl1pPr>
-          </a:lstStyle>
-          <a:p>
-            <a:fld id="{CE5E9CC1-C706-0F49-92D6-E571CC5EEA8F}" type="slidenum">
-              <a:rPr lang="en-US"/>
-              <a:t>‹#›</a:t>
-            </a:fld>
-            <a:endParaRPr lang="en-US"/>
-          </a:p>
-        </p:txBody>
-      </p:sp>
     </p:spTree>
     <p:extLst>
       <p:ext uri="{BB962C8B-B14F-4D97-AF65-F5344CB8AC3E}">
-        <p14:creationId xmlns:p14="http://schemas.microsoft.com/office/powerpoint/2010/main" val="1024086991"/>
+        <p14:creationId xmlns:p14="http://schemas.microsoft.com/office/powerpoint/2010/main" val="3561943530"/>
       </p:ext>
     </p:extLst>
   </p:cSld>
@@ -522,7 +304,6 @@
               <a:rPr lang="en-US" dirty="0"/>
               <a:t>0:00–0:02. Connect to Lecture 12: interpolation inserts L−1 zeros. Today we exploit that structure instead of multiplying all those zeros by FIR coefficients.</a:t>
             </a:r>
-            <a:endParaRPr lang="en-US" dirty="0"/>
           </a:p>
         </p:txBody>
       </p:sp>
@@ -608,9 +389,8 @@
           <a:p>
             <a:r>
               <a:rPr lang="en-US" dirty="0"/>
-              <a:t>0:35–0:43. Use audio example: low band carries slow spectral structure; high band carries transients/detail.</a:t>
-            </a:r>
-            <a:endParaRPr lang="en-US" dirty="0"/>
+              <a:t>0:35. This is the conceptual extension from rate conversion to multiple parallel bands.</a:t>
+            </a:r>
           </a:p>
         </p:txBody>
       </p:sp>
@@ -696,9 +476,8 @@
           <a:p>
             <a:r>
               <a:rPr lang="en-US" dirty="0"/>
-              <a:t>0:43–0:48. Perfect reconstruction usually allows a scale c and pure delay d; the important requirement is no distortion beyond those trivial effects.</a:t>
-            </a:r>
-            <a:endParaRPr lang="en-US" dirty="0"/>
+              <a:t>0:35–0:43. Use audio example: low band carries slow spectral structure; high band carries transients/detail.</a:t>
+            </a:r>
           </a:p>
         </p:txBody>
       </p:sp>
@@ -784,9 +563,8 @@
           <a:p>
             <a:r>
               <a:rPr lang="en-US" dirty="0"/>
-              <a:t>0:48–0:53. Treat equations as enrichment for first-year students, core material for seniors.</a:t>
-            </a:r>
-            <a:endParaRPr lang="en-US" dirty="0"/>
+              <a:t>0:43–0:48. Perfect reconstruction usually allows a scale c and pure delay d; the important requirement is no distortion beyond those trivial effects.</a:t>
+            </a:r>
           </a:p>
         </p:txBody>
       </p:sp>
@@ -872,9 +650,8 @@
           <a:p>
             <a:r>
               <a:rPr lang="en-US" dirty="0"/>
-              <a:t>0:53–0:55. This pairwise form avoids indexing distractions and makes exact reconstruction obvious. It is also an orthonormal transform, so energy is preserved.</a:t>
-            </a:r>
-            <a:endParaRPr lang="en-US" dirty="0"/>
+              <a:t>0:48–0:53. Treat equations as enrichment for first-year students, core material for seniors.</a:t>
+            </a:r>
           </a:p>
         </p:txBody>
       </p:sp>
@@ -960,9 +737,8 @@
           <a:p>
             <a:r>
               <a:rPr lang="en-US" dirty="0"/>
-              <a:t>0:55. Bridge from signal representation to feature engineering.</a:t>
-            </a:r>
-            <a:endParaRPr lang="en-US" dirty="0"/>
+              <a:t>0:53–0:55. This pairwise form avoids indexing distractions and makes exact reconstruction obvious. It is also an orthonormal transform, so energy is preserved.</a:t>
+            </a:r>
           </a:p>
         </p:txBody>
       </p:sp>
@@ -1048,9 +824,8 @@
           <a:p>
             <a:r>
               <a:rPr lang="en-US" dirty="0"/>
-              <a:t>0:55–1:03. Clarify that Mel filter banks often operate on a magnitude/power spectrum rather than being implemented as time-domain PR filter banks. The common idea is fixed frequency partitioning.</a:t>
-            </a:r>
-            <a:endParaRPr lang="en-US" dirty="0"/>
+              <a:t>0:55. Bridge from signal representation to feature engineering.</a:t>
+            </a:r>
           </a:p>
         </p:txBody>
       </p:sp>
@@ -1136,9 +911,8 @@
           <a:p>
             <a:r>
               <a:rPr lang="en-US" dirty="0"/>
-              <a:t>1:03–1:09. Avoid claiming learned conv filters automatically form a perfect-reconstruction bank. PR requires explicit architectural/filter constraints.</a:t>
-            </a:r>
-            <a:endParaRPr lang="en-US" dirty="0"/>
+              <a:t>0:55–1:03. Clarify that Mel filter banks often operate on a magnitude/power spectrum rather than being implemented as time-domain PR filter banks. The common idea is fixed frequency partitioning.</a:t>
+            </a:r>
           </a:p>
         </p:txBody>
       </p:sp>
@@ -1224,9 +998,8 @@
           <a:p>
             <a:r>
               <a:rPr lang="en-US" dirty="0"/>
-              <a:t>1:09–1:14. The accompanying notebook runs both scikit-learn and PyTorch variants. Ask whether the fixed bank would still be optimal if class frequencies changed.</a:t>
-            </a:r>
-            <a:endParaRPr lang="en-US" dirty="0"/>
+              <a:t>1:03–1:09. Avoid claiming learned conv filters automatically form a perfect-reconstruction bank. PR requires explicit architectural/filter constraints.</a:t>
+            </a:r>
           </a:p>
         </p:txBody>
       </p:sp>
@@ -1312,9 +1085,8 @@
           <a:p>
             <a:r>
               <a:rPr lang="en-US" dirty="0"/>
-              <a:t>1:14–1:15. A stronger answer distinguishes “don’t compute discarded outputs” for decimation from “don’t multiply inserted zeros” for interpolation.</a:t>
-            </a:r>
-            <a:endParaRPr lang="en-US" dirty="0"/>
+              <a:t>1:09–1:14. The accompanying notebook runs both scikit-learn and PyTorch variants. Ask whether the fixed bank would still be optimal if class frequencies changed.</a:t>
+            </a:r>
           </a:p>
         </p:txBody>
       </p:sp>
@@ -1400,9 +1172,8 @@
           <a:p>
             <a:r>
               <a:rPr lang="en-US" dirty="0"/>
-              <a:t>Appendix slide for course-site distribution.</a:t>
-            </a:r>
-            <a:endParaRPr lang="en-US" dirty="0"/>
+              <a:t>1:14–1:15. A stronger answer distinguishes “don’t compute discarded outputs” for decimation from “don’t multiply inserted zeros” for interpolation.</a:t>
+            </a:r>
           </a:p>
         </p:txBody>
       </p:sp>
@@ -1490,7 +1261,6 @@
               <a:rPr lang="en-US" dirty="0"/>
               <a:t>Core question: Can the same phase decomposition that accelerated decimation also construct high-rate outputs without doing work on inserted zeros?</a:t>
             </a:r>
-            <a:endParaRPr lang="en-US" dirty="0"/>
           </a:p>
         </p:txBody>
       </p:sp>
@@ -1512,6 +1282,93 @@
             <a:fld id="{F7021451-1387-4CA6-816F-3879F97B5CBC}" type="slidenum">
               <a:rPr lang="en-US"/>
               <a:t>2</a:t>
+            </a:fld>
+            <a:endParaRPr lang="en-US"/>
+          </a:p>
+        </p:txBody>
+      </p:sp>
+    </p:spTree>
+    <p:extLst>
+      <p:ext uri="{BB962C8B-B14F-4D97-AF65-F5344CB8AC3E}">
+        <p14:creationId xmlns:p14="http://schemas.microsoft.com/office/powerpoint/2010/main" val="1024086991"/>
+      </p:ext>
+    </p:extLst>
+  </p:cSld>
+  <p:clrMapOvr>
+    <a:masterClrMapping/>
+  </p:clrMapOvr>
+</p:notes>
+</file>
+
+<file path=ppt/notesSlides/notesSlide20.xml><?xml version="1.0" encoding="utf-8"?>
+<p:notes xmlns:a="http://schemas.openxmlformats.org/drawingml/2006/main" xmlns:r="http://schemas.openxmlformats.org/officeDocument/2006/relationships" xmlns:p="http://schemas.openxmlformats.org/presentationml/2006/main">
+  <p:cSld>
+    <p:spTree>
+      <p:nvGrpSpPr>
+        <p:cNvPr id="1" name=""/>
+        <p:cNvGrpSpPr/>
+        <p:nvPr/>
+      </p:nvGrpSpPr>
+      <p:grpSpPr>
+        <a:xfrm>
+          <a:off x="0" y="0"/>
+          <a:ext cx="0" cy="0"/>
+          <a:chOff x="0" y="0"/>
+          <a:chExt cx="0" cy="0"/>
+        </a:xfrm>
+      </p:grpSpPr>
+      <p:sp>
+        <p:nvSpPr>
+          <p:cNvPr id="2" name="Slide Image Placeholder 1"/>
+          <p:cNvSpPr>
+            <a:spLocks noGrp="1" noRot="1" noChangeAspect="1"/>
+          </p:cNvSpPr>
+          <p:nvPr>
+            <p:ph type="sldImg"/>
+          </p:nvPr>
+        </p:nvSpPr>
+        <p:spPr/>
+      </p:sp>
+      <p:sp>
+        <p:nvSpPr>
+          <p:cNvPr id="3" name="Notes Placeholder 2"/>
+          <p:cNvSpPr>
+            <a:spLocks noGrp="1"/>
+          </p:cNvSpPr>
+          <p:nvPr>
+            <p:ph type="body" idx="1"/>
+          </p:nvPr>
+        </p:nvSpPr>
+        <p:spPr/>
+        <p:txBody>
+          <a:bodyPr/>
+          <a:lstStyle/>
+          <a:p>
+            <a:r>
+              <a:rPr lang="en-US" dirty="0"/>
+              <a:t>Appendix slide for course-site distribution.</a:t>
+            </a:r>
+          </a:p>
+        </p:txBody>
+      </p:sp>
+      <p:sp>
+        <p:nvSpPr>
+          <p:cNvPr id="4" name="Slide Number Placeholder 3"/>
+          <p:cNvSpPr>
+            <a:spLocks noGrp="1"/>
+          </p:cNvSpPr>
+          <p:nvPr>
+            <p:ph type="sldNum" sz="quarter" idx="10"/>
+          </p:nvPr>
+        </p:nvSpPr>
+        <p:spPr/>
+        <p:txBody>
+          <a:bodyPr/>
+          <a:lstStyle/>
+          <a:p>
+            <a:fld id="{F7021451-1387-4CA6-816F-3879F97B5CBC}" type="slidenum">
+              <a:rPr lang="en-US"/>
+              <a:t>20</a:t>
             </a:fld>
             <a:endParaRPr lang="en-US"/>
           </a:p>
@@ -1578,7 +1435,6 @@
               <a:rPr lang="en-US" dirty="0"/>
               <a:t>0:02–0:03. Recall ↑L creates L output phases; polyphase makes those phases explicit.</a:t>
             </a:r>
-            <a:endParaRPr lang="en-US" dirty="0"/>
           </a:p>
         </p:txBody>
       </p:sp>
@@ -1666,7 +1522,6 @@
               <a:rPr lang="en-US" dirty="0"/>
               <a:t>0:03–0:10. Reuse the decomposition from Lecture 13, but now M is replaced by the interpolation factor L.</a:t>
             </a:r>
-            <a:endParaRPr lang="en-US" dirty="0"/>
           </a:p>
         </p:txBody>
       </p:sp>
@@ -1754,7 +1609,6 @@
               <a:rPr lang="en-US" dirty="0"/>
               <a:t>0:10–0:17. Numerical proof is in the notebook. This is the dual of the First Noble Identity.</a:t>
             </a:r>
-            <a:endParaRPr lang="en-US" dirty="0"/>
           </a:p>
         </p:txBody>
       </p:sp>
@@ -1842,7 +1696,6 @@
               <a:rPr lang="en-US" dirty="0"/>
               <a:t>0:17–0:27. This equation is highly intuitive: phase k produces all output indices congruent to k modulo L.</a:t>
             </a:r>
-            <a:endParaRPr lang="en-US" dirty="0"/>
           </a:p>
         </p:txBody>
       </p:sp>
@@ -1930,7 +1783,6 @@
               <a:rPr lang="en-US" dirty="0"/>
               <a:t>0:27–0:32. Connect back to Week 6: rate-change theory is unchanged; only implementation is reorganized.</a:t>
             </a:r>
-            <a:endParaRPr lang="en-US" dirty="0"/>
           </a:p>
         </p:txBody>
       </p:sp>
@@ -2018,7 +1870,6 @@
               <a:rPr lang="en-US" dirty="0"/>
               <a:t>0:32–0:35. Do not require exact endpoint/transient operation counts.</a:t>
             </a:r>
-            <a:endParaRPr lang="en-US" dirty="0"/>
           </a:p>
         </p:txBody>
       </p:sp>
@@ -2063,7 +1914,13 @@
   <p:cSld>
     <p:spTree>
       <p:nvGrpSpPr>
-        <p:cNvPr id="1" name=""/>
+        <p:cNvPr id="1" name="">
+          <a:extLst>
+            <a:ext uri="{FF2B5EF4-FFF2-40B4-BE49-F238E27FC236}">
+              <a16:creationId xmlns:a16="http://schemas.microsoft.com/office/drawing/2014/main" id="{AB90ED10-AFE7-D4EB-AFB8-3A65224D7973}"/>
+            </a:ext>
+          </a:extLst>
+        </p:cNvPr>
         <p:cNvGrpSpPr/>
         <p:nvPr/>
       </p:nvGrpSpPr>
@@ -2077,7 +1934,13 @@
       </p:grpSpPr>
       <p:sp>
         <p:nvSpPr>
-          <p:cNvPr id="2" name="Slide Image Placeholder 1"/>
+          <p:cNvPr id="2" name="Slide Image Placeholder 1">
+            <a:extLst>
+              <a:ext uri="{FF2B5EF4-FFF2-40B4-BE49-F238E27FC236}">
+                <a16:creationId xmlns:a16="http://schemas.microsoft.com/office/drawing/2014/main" id="{E92104C6-F2C9-0E8C-BC19-CE3ABA5D485E}"/>
+              </a:ext>
+            </a:extLst>
+          </p:cNvPr>
           <p:cNvSpPr>
             <a:spLocks noGrp="1" noRot="1" noChangeAspect="1"/>
           </p:cNvSpPr>
@@ -2089,7 +1952,13 @@
       </p:sp>
       <p:sp>
         <p:nvSpPr>
-          <p:cNvPr id="3" name="Notes Placeholder 2"/>
+          <p:cNvPr id="3" name="Notes Placeholder 2">
+            <a:extLst>
+              <a:ext uri="{FF2B5EF4-FFF2-40B4-BE49-F238E27FC236}">
+                <a16:creationId xmlns:a16="http://schemas.microsoft.com/office/drawing/2014/main" id="{548603B9-DCC2-FB28-FE1A-0AD9BD07D1C4}"/>
+              </a:ext>
+            </a:extLst>
+          </p:cNvPr>
           <p:cNvSpPr>
             <a:spLocks noGrp="1"/>
           </p:cNvSpPr>
@@ -2104,15 +1973,20 @@
           <a:p>
             <a:r>
               <a:rPr lang="en-US" dirty="0"/>
-              <a:t>0:35. This is the conceptual extension from rate conversion to multiple parallel bands.</a:t>
-            </a:r>
-            <a:endParaRPr lang="en-US" dirty="0"/>
-          </a:p>
-        </p:txBody>
-      </p:sp>
-      <p:sp>
-        <p:nvSpPr>
-          <p:cNvPr id="4" name="Slide Number Placeholder 3"/>
+              <a:t>0:32–0:35. Do not require exact endpoint/transient operation counts.</a:t>
+            </a:r>
+          </a:p>
+        </p:txBody>
+      </p:sp>
+      <p:sp>
+        <p:nvSpPr>
+          <p:cNvPr id="4" name="Slide Number Placeholder 3">
+            <a:extLst>
+              <a:ext uri="{FF2B5EF4-FFF2-40B4-BE49-F238E27FC236}">
+                <a16:creationId xmlns:a16="http://schemas.microsoft.com/office/drawing/2014/main" id="{3DA5B316-CAF7-C462-B4DF-E3CA66564288}"/>
+              </a:ext>
+            </a:extLst>
+          </p:cNvPr>
           <p:cNvSpPr>
             <a:spLocks noGrp="1"/>
           </p:cNvSpPr>
@@ -2136,7 +2010,7 @@
     </p:spTree>
     <p:extLst>
       <p:ext uri="{BB962C8B-B14F-4D97-AF65-F5344CB8AC3E}">
-        <p14:creationId xmlns:p14="http://schemas.microsoft.com/office/powerpoint/2010/main" val="1024086991"/>
+        <p14:creationId xmlns:p14="http://schemas.microsoft.com/office/powerpoint/2010/main" val="3912006993"/>
       </p:ext>
     </p:extLst>
   </p:cSld>
@@ -2184,6 +2058,7 @@
         <a:solidFill>
           <a:srgbClr val="FFFFFF"/>
         </a:solidFill>
+        <a:effectLst/>
       </p:bgPr>
     </p:bg>
     <p:spTree>
@@ -2246,7 +2121,7 @@
           <a:bodyPr wrap="square" lIns="0" tIns="0" rIns="0" bIns="0" rtlCol="0" anchor="ctr"/>
           <a:lstStyle/>
           <a:p>
-            <a:pPr indent="0" marL="0">
+            <a:pPr marL="0" indent="0">
               <a:buNone/>
             </a:pPr>
             <a:r>
@@ -2285,7 +2160,7 @@
           <a:bodyPr wrap="square" lIns="0" tIns="0" rIns="0" bIns="0" rtlCol="0" anchor="ctr"/>
           <a:lstStyle/>
           <a:p>
-            <a:pPr algn="r" indent="0" marL="0">
+            <a:pPr marL="0" indent="0" algn="r">
               <a:buNone/>
             </a:pPr>
             <a:r>
@@ -2346,7 +2221,7 @@
           </a:prstGeom>
           <a:extLst>
             <a:ext uri="{C572A759-6A51-4108-AA02-DFA0A04FC94B}">
-              <ma14:wrappingTextBoxFlag xmlns:ma14="http://schemas.microsoft.com/office/mac/drawingml/2011/main" val="0"/>
+              <ma14:wrappingTextBoxFlag xmlns:ma14="http://schemas.microsoft.com/office/mac/drawingml/2011/main" xmlns="" val="0"/>
             </a:ext>
           </a:extLst>
         </p:spPr>
@@ -2367,8 +2242,8 @@
           <a:p>
             <a:pPr algn="r"/>
             <a:fld id="{F7021451-1387-4CA6-816F-3879F97B5CBC}" type="slidenum">
-              <a:rPr b="0" lang="en-US"/>
-              <a:t>1002</a:t>
+              <a:rPr lang="en-US" b="0"/>
+              <a:t>‹#›</a:t>
             </a:fld>
             <a:endParaRPr lang="en-US"/>
           </a:p>
@@ -2385,6 +2260,11 @@
 <file path=ppt/slideMasters/slideMaster1.xml><?xml version="1.0" encoding="utf-8"?>
 <p:sldMaster xmlns:a="http://schemas.openxmlformats.org/drawingml/2006/main" xmlns:r="http://schemas.openxmlformats.org/officeDocument/2006/relationships" xmlns:p="http://schemas.openxmlformats.org/presentationml/2006/main">
   <p:cSld>
+    <p:bg>
+      <p:bgRef idx="1001">
+        <a:schemeClr val="bg1"/>
+      </p:bgRef>
+    </p:bg>
     <p:spTree>
       <p:nvGrpSpPr>
         <p:cNvPr id="1" name=""/>
@@ -2419,7 +2299,7 @@
           </a:prstGeom>
           <a:extLst>
             <a:ext uri="{C572A759-6A51-4108-AA02-DFA0A04FC94B}">
-              <ma14:wrappingTextBoxFlag xmlns:ma14="http://schemas.microsoft.com/office/mac/drawingml/2011/main" val="0"/>
+              <ma14:wrappingTextBoxFlag xmlns:ma14="http://schemas.microsoft.com/office/mac/drawingml/2011/main" xmlns="" val="0"/>
             </a:ext>
           </a:extLst>
         </p:spPr>
@@ -2440,8 +2320,8 @@
           <a:p>
             <a:pPr algn="r"/>
             <a:fld id="{F7021451-1387-4CA6-816F-3879F97B5CBC}" type="slidenum">
-              <a:rPr b="0" lang="en-US"/>
-              <a:t>null</a:t>
+              <a:rPr lang="en-US" b="0"/>
+              <a:t>‹#›</a:t>
             </a:fld>
             <a:endParaRPr lang="en-US"/>
           </a:p>
@@ -2716,6 +2596,7 @@
         <a:solidFill>
           <a:srgbClr val="17324D"/>
         </a:solidFill>
+        <a:effectLst/>
       </p:bgPr>
     </p:bg>
     <p:spTree>
@@ -2756,6 +2637,13 @@
             <a:prstDash val="solid"/>
           </a:ln>
         </p:spPr>
+        <p:txBody>
+          <a:bodyPr/>
+          <a:lstStyle/>
+          <a:p>
+            <a:endParaRPr lang="en-US"/>
+          </a:p>
+        </p:txBody>
       </p:sp>
       <p:sp>
         <p:nvSpPr>
@@ -2778,7 +2666,7 @@
           <a:bodyPr wrap="square" lIns="0" tIns="0" rIns="0" bIns="0" rtlCol="0" anchor="ctr"/>
           <a:lstStyle/>
           <a:p>
-            <a:pPr indent="0" marL="0">
+            <a:pPr marL="0" indent="0">
               <a:buNone/>
             </a:pPr>
             <a:r>
@@ -2790,7 +2678,7 @@
                 <a:ea typeface="Aptos" pitchFamily="34" charset="-122"/>
                 <a:cs typeface="Aptos" pitchFamily="34" charset="-120"/>
               </a:rPr>
-              <a:t>LECTURE 14</a:t>
+              <a:t>WEEK 7 ● LECTURE 14</a:t>
             </a:r>
             <a:endParaRPr lang="en-US" sz="1200" dirty="0"/>
           </a:p>
@@ -2819,7 +2707,7 @@
           </a:bodyPr>
           <a:lstStyle/>
           <a:p>
-            <a:pPr indent="0" marL="0">
+            <a:pPr marL="0" indent="0">
               <a:buNone/>
             </a:pPr>
             <a:r>
@@ -2858,7 +2746,7 @@
           <a:bodyPr wrap="square" lIns="0" tIns="0" rIns="0" bIns="0" rtlCol="0" anchor="ctr"/>
           <a:lstStyle/>
           <a:p>
-            <a:pPr indent="0" marL="0">
+            <a:pPr marL="0" indent="0">
               <a:buNone/>
             </a:pPr>
             <a:r>
@@ -2900,6 +2788,13 @@
             <a:prstDash val="solid"/>
           </a:ln>
         </p:spPr>
+        <p:txBody>
+          <a:bodyPr/>
+          <a:lstStyle/>
+          <a:p>
+            <a:endParaRPr lang="en-US"/>
+          </a:p>
+        </p:txBody>
       </p:sp>
       <p:sp>
         <p:nvSpPr>
@@ -2920,11 +2815,11 @@
         </p:spPr>
         <p:txBody>
           <a:bodyPr wrap="square" lIns="0" tIns="0" rIns="0" bIns="0" rtlCol="0" anchor="ctr">
-            <a:normAutofit/>
+            <a:normAutofit fontScale="92500" lnSpcReduction="20000"/>
           </a:bodyPr>
           <a:lstStyle/>
           <a:p>
-            <a:pPr algn="ctr" indent="0" marL="0">
+            <a:pPr marL="0" indent="0" algn="ctr">
               <a:buNone/>
             </a:pPr>
             <a:r>
@@ -2966,6 +2861,13 @@
             <a:prstDash val="solid"/>
           </a:ln>
         </p:spPr>
+        <p:txBody>
+          <a:bodyPr/>
+          <a:lstStyle/>
+          <a:p>
+            <a:endParaRPr lang="en-US"/>
+          </a:p>
+        </p:txBody>
       </p:sp>
       <p:sp>
         <p:nvSpPr>
@@ -2986,11 +2888,11 @@
         </p:spPr>
         <p:txBody>
           <a:bodyPr wrap="square" lIns="0" tIns="0" rIns="0" bIns="0" rtlCol="0" anchor="ctr">
-            <a:normAutofit/>
+            <a:normAutofit fontScale="92500" lnSpcReduction="10000"/>
           </a:bodyPr>
           <a:lstStyle/>
           <a:p>
-            <a:pPr algn="ctr" indent="0" marL="0">
+            <a:pPr marL="0" indent="0" algn="ctr">
               <a:buNone/>
             </a:pPr>
             <a:r>
@@ -3029,7 +2931,7 @@
           <a:bodyPr wrap="square" lIns="0" tIns="0" rIns="0" bIns="0" rtlCol="0" anchor="ctr"/>
           <a:lstStyle/>
           <a:p>
-            <a:pPr indent="0" marL="0">
+            <a:pPr marL="0" indent="0">
               <a:buNone/>
             </a:pPr>
             <a:r>
@@ -3056,6 +2958,206 @@
 </file>
 
 <file path=ppt/slides/slide10.xml><?xml version="1.0" encoding="utf-8"?>
+<p:sld xmlns:a="http://schemas.openxmlformats.org/drawingml/2006/main" xmlns:r="http://schemas.openxmlformats.org/officeDocument/2006/relationships" xmlns:p="http://schemas.openxmlformats.org/presentationml/2006/main">
+  <p:cSld name="Slide 9">
+    <p:bg>
+      <p:bgPr>
+        <a:solidFill>
+          <a:srgbClr val="17324D"/>
+        </a:solidFill>
+        <a:effectLst/>
+      </p:bgPr>
+    </p:bg>
+    <p:spTree>
+      <p:nvGrpSpPr>
+        <p:cNvPr id="1" name=""/>
+        <p:cNvGrpSpPr/>
+        <p:nvPr/>
+      </p:nvGrpSpPr>
+      <p:grpSpPr>
+        <a:xfrm>
+          <a:off x="0" y="0"/>
+          <a:ext cx="0" cy="0"/>
+          <a:chOff x="0" y="0"/>
+          <a:chExt cx="0" cy="0"/>
+        </a:xfrm>
+      </p:grpSpPr>
+      <p:sp>
+        <p:nvSpPr>
+          <p:cNvPr id="2" name="Text 0"/>
+          <p:cNvSpPr/>
+          <p:nvPr/>
+        </p:nvSpPr>
+        <p:spPr>
+          <a:xfrm>
+            <a:off x="658368" y="1097280"/>
+            <a:ext cx="1280160" cy="548640"/>
+          </a:xfrm>
+          <a:prstGeom prst="rect">
+            <a:avLst/>
+          </a:prstGeom>
+          <a:noFill/>
+          <a:ln/>
+        </p:spPr>
+        <p:txBody>
+          <a:bodyPr wrap="square" lIns="0" tIns="0" rIns="0" bIns="0" rtlCol="0" anchor="ctr"/>
+          <a:lstStyle/>
+          <a:p>
+            <a:pPr marL="0" indent="0">
+              <a:buNone/>
+            </a:pPr>
+            <a:r>
+              <a:rPr lang="en-US" sz="3200" b="1" dirty="0">
+                <a:solidFill>
+                  <a:srgbClr val="78D6E0"/>
+                </a:solidFill>
+                <a:latin typeface="Aptos" pitchFamily="34" charset="0"/>
+                <a:ea typeface="Aptos" pitchFamily="34" charset="-122"/>
+                <a:cs typeface="Aptos" pitchFamily="34" charset="-120"/>
+              </a:rPr>
+              <a:t>02</a:t>
+            </a:r>
+            <a:endParaRPr lang="en-US" sz="3200" dirty="0"/>
+          </a:p>
+        </p:txBody>
+      </p:sp>
+      <p:sp>
+        <p:nvSpPr>
+          <p:cNvPr id="3" name="Text 1"/>
+          <p:cNvSpPr/>
+          <p:nvPr/>
+        </p:nvSpPr>
+        <p:spPr>
+          <a:xfrm>
+            <a:off x="658368" y="1874520"/>
+            <a:ext cx="10515600" cy="960120"/>
+          </a:xfrm>
+          <a:prstGeom prst="rect">
+            <a:avLst/>
+          </a:prstGeom>
+          <a:noFill/>
+          <a:ln/>
+        </p:spPr>
+        <p:txBody>
+          <a:bodyPr wrap="square" lIns="0" tIns="0" rIns="0" bIns="0" rtlCol="0" anchor="ctr">
+            <a:normAutofit/>
+          </a:bodyPr>
+          <a:lstStyle/>
+          <a:p>
+            <a:pPr marL="0" indent="0">
+              <a:buNone/>
+            </a:pPr>
+            <a:r>
+              <a:rPr lang="en-US" sz="3400" b="1" dirty="0">
+                <a:solidFill>
+                  <a:srgbClr val="FFFFFF"/>
+                </a:solidFill>
+                <a:latin typeface="Aptos" pitchFamily="34" charset="0"/>
+                <a:ea typeface="Aptos" pitchFamily="34" charset="-122"/>
+                <a:cs typeface="Aptos" pitchFamily="34" charset="-120"/>
+              </a:rPr>
+              <a:t>Two-channel filter banks</a:t>
+            </a:r>
+            <a:endParaRPr lang="en-US" sz="3400" dirty="0"/>
+          </a:p>
+        </p:txBody>
+      </p:sp>
+      <p:sp>
+        <p:nvSpPr>
+          <p:cNvPr id="4" name="Text 2"/>
+          <p:cNvSpPr/>
+          <p:nvPr/>
+        </p:nvSpPr>
+        <p:spPr>
+          <a:xfrm>
+            <a:off x="676656" y="3017520"/>
+            <a:ext cx="9875520" cy="457200"/>
+          </a:xfrm>
+          <a:prstGeom prst="rect">
+            <a:avLst/>
+          </a:prstGeom>
+          <a:noFill/>
+          <a:ln/>
+        </p:spPr>
+        <p:txBody>
+          <a:bodyPr wrap="square" lIns="0" tIns="0" rIns="0" bIns="0" rtlCol="0" anchor="ctr"/>
+          <a:lstStyle/>
+          <a:p>
+            <a:pPr marL="0" indent="0">
+              <a:buNone/>
+            </a:pPr>
+            <a:r>
+              <a:rPr lang="en-US" sz="1600" dirty="0">
+                <a:solidFill>
+                  <a:srgbClr val="D6EAF0"/>
+                </a:solidFill>
+                <a:latin typeface="Aptos" pitchFamily="34" charset="0"/>
+                <a:ea typeface="Aptos" pitchFamily="34" charset="-122"/>
+                <a:cs typeface="Aptos" pitchFamily="34" charset="-120"/>
+              </a:rPr>
+              <a:t>Split the signal into subbands, reduce each rate, then combine them again.</a:t>
+            </a:r>
+            <a:endParaRPr lang="en-US" sz="1600" dirty="0"/>
+          </a:p>
+        </p:txBody>
+      </p:sp>
+      <p:sp>
+        <p:nvSpPr>
+          <p:cNvPr id="25" name="Slide Number Placeholder 0"/>
+          <p:cNvSpPr>
+            <a:spLocks noGrp="1"/>
+          </p:cNvSpPr>
+          <p:nvPr>
+            <p:ph type="sldNum" sz="quarter" idx="4294967295"/>
+          </p:nvPr>
+        </p:nvSpPr>
+        <p:spPr>
+          <a:xfrm>
+            <a:off x="11750040" y="6519672"/>
+            <a:ext cx="201168" cy="164592"/>
+          </a:xfrm>
+          <a:prstGeom prst="rect">
+            <a:avLst/>
+          </a:prstGeom>
+          <a:extLst>
+            <a:ext uri="{C572A759-6A51-4108-AA02-DFA0A04FC94B}">
+              <ma14:wrappingTextBoxFlag xmlns:ma14="http://schemas.microsoft.com/office/mac/drawingml/2011/main" xmlns="" val="0"/>
+            </a:ext>
+          </a:extLst>
+        </p:spPr>
+        <p:txBody>
+          <a:bodyPr/>
+          <a:lstStyle>
+            <a:lvl1pPr>
+              <a:defRPr sz="800">
+                <a:solidFill>
+                  <a:srgbClr val="64748B"/>
+                </a:solidFill>
+                <a:latin typeface="Aptos"/>
+                <a:ea typeface="Aptos"/>
+                <a:cs typeface="Aptos"/>
+              </a:defRPr>
+            </a:lvl1pPr>
+          </a:lstStyle>
+          <a:p>
+            <a:pPr algn="r"/>
+            <a:fld id="{F7021451-1387-4CA6-816F-3879F97B5CBC}" type="slidenum">
+              <a:rPr lang="en-US" b="0"/>
+              <a:t>10</a:t>
+            </a:fld>
+            <a:endParaRPr lang="en-US"/>
+          </a:p>
+        </p:txBody>
+      </p:sp>
+    </p:spTree>
+  </p:cSld>
+  <p:clrMapOvr>
+    <a:masterClrMapping/>
+  </p:clrMapOvr>
+</p:sld>
+</file>
+
+<file path=ppt/slides/slide11.xml><?xml version="1.0" encoding="utf-8"?>
 <p:sld xmlns:a="http://schemas.openxmlformats.org/drawingml/2006/main" xmlns:r="http://schemas.openxmlformats.org/officeDocument/2006/relationships" xmlns:p="http://schemas.openxmlformats.org/presentationml/2006/main">
   <p:cSld name="Slide 10">
     <p:spTree>
@@ -3095,7 +3197,7 @@
           </a:bodyPr>
           <a:lstStyle/>
           <a:p>
-            <a:pPr indent="0" marL="0">
+            <a:pPr marL="0" indent="0">
               <a:buNone/>
             </a:pPr>
             <a:r>
@@ -3136,7 +3238,7 @@
           </a:bodyPr>
           <a:lstStyle/>
           <a:p>
-            <a:pPr indent="0" marL="0">
+            <a:pPr marL="0" indent="0">
               <a:buNone/>
             </a:pPr>
             <a:r>
@@ -3178,6 +3280,13 @@
             <a:prstDash val="solid"/>
           </a:ln>
         </p:spPr>
+        <p:txBody>
+          <a:bodyPr/>
+          <a:lstStyle/>
+          <a:p>
+            <a:endParaRPr lang="en-US"/>
+          </a:p>
+        </p:txBody>
       </p:sp>
       <p:sp>
         <p:nvSpPr>
@@ -3202,7 +3311,7 @@
           </a:bodyPr>
           <a:lstStyle/>
           <a:p>
-            <a:pPr algn="ctr" indent="0" marL="0">
+            <a:pPr marL="0" indent="0" algn="ctr">
               <a:buNone/>
             </a:pPr>
             <a:r>
@@ -3244,6 +3353,13 @@
             <a:tailEnd type="triangle"/>
           </a:ln>
         </p:spPr>
+        <p:txBody>
+          <a:bodyPr/>
+          <a:lstStyle/>
+          <a:p>
+            <a:endParaRPr lang="en-US"/>
+          </a:p>
+        </p:txBody>
       </p:sp>
       <p:sp>
         <p:nvSpPr>
@@ -3269,6 +3385,13 @@
             <a:prstDash val="solid"/>
           </a:ln>
         </p:spPr>
+        <p:txBody>
+          <a:bodyPr/>
+          <a:lstStyle/>
+          <a:p>
+            <a:endParaRPr lang="en-US"/>
+          </a:p>
+        </p:txBody>
       </p:sp>
       <p:sp>
         <p:nvSpPr>
@@ -3293,7 +3416,7 @@
           </a:bodyPr>
           <a:lstStyle/>
           <a:p>
-            <a:pPr algn="ctr" indent="0" marL="0">
+            <a:pPr marL="0" indent="0" algn="ctr">
               <a:buNone/>
             </a:pPr>
             <a:r>
@@ -3335,6 +3458,13 @@
             <a:prstDash val="solid"/>
           </a:ln>
         </p:spPr>
+        <p:txBody>
+          <a:bodyPr/>
+          <a:lstStyle/>
+          <a:p>
+            <a:endParaRPr lang="en-US"/>
+          </a:p>
+        </p:txBody>
       </p:sp>
       <p:sp>
         <p:nvSpPr>
@@ -3359,7 +3489,7 @@
           </a:bodyPr>
           <a:lstStyle/>
           <a:p>
-            <a:pPr algn="ctr" indent="0" marL="0">
+            <a:pPr marL="0" indent="0" algn="ctr">
               <a:buNone/>
             </a:pPr>
             <a:r>
@@ -3401,6 +3531,13 @@
             <a:tailEnd type="triangle"/>
           </a:ln>
         </p:spPr>
+        <p:txBody>
+          <a:bodyPr/>
+          <a:lstStyle/>
+          <a:p>
+            <a:endParaRPr lang="en-US"/>
+          </a:p>
+        </p:txBody>
       </p:sp>
       <p:sp>
         <p:nvSpPr>
@@ -3426,6 +3563,13 @@
             <a:tailEnd type="triangle"/>
           </a:ln>
         </p:spPr>
+        <p:txBody>
+          <a:bodyPr/>
+          <a:lstStyle/>
+          <a:p>
+            <a:endParaRPr lang="en-US"/>
+          </a:p>
+        </p:txBody>
       </p:sp>
       <p:sp>
         <p:nvSpPr>
@@ -3451,6 +3595,13 @@
             <a:prstDash val="solid"/>
           </a:ln>
         </p:spPr>
+        <p:txBody>
+          <a:bodyPr/>
+          <a:lstStyle/>
+          <a:p>
+            <a:endParaRPr lang="en-US"/>
+          </a:p>
+        </p:txBody>
       </p:sp>
       <p:sp>
         <p:nvSpPr>
@@ -3475,7 +3626,7 @@
           </a:bodyPr>
           <a:lstStyle/>
           <a:p>
-            <a:pPr algn="ctr" indent="0" marL="0">
+            <a:pPr marL="0" indent="0" algn="ctr">
               <a:buNone/>
             </a:pPr>
             <a:r>
@@ -3517,6 +3668,13 @@
             <a:prstDash val="solid"/>
           </a:ln>
         </p:spPr>
+        <p:txBody>
+          <a:bodyPr/>
+          <a:lstStyle/>
+          <a:p>
+            <a:endParaRPr lang="en-US"/>
+          </a:p>
+        </p:txBody>
       </p:sp>
       <p:sp>
         <p:nvSpPr>
@@ -3541,7 +3699,7 @@
           </a:bodyPr>
           <a:lstStyle/>
           <a:p>
-            <a:pPr algn="ctr" indent="0" marL="0">
+            <a:pPr marL="0" indent="0" algn="ctr">
               <a:buNone/>
             </a:pPr>
             <a:r>
@@ -3583,6 +3741,13 @@
             <a:tailEnd type="triangle"/>
           </a:ln>
         </p:spPr>
+        <p:txBody>
+          <a:bodyPr/>
+          <a:lstStyle/>
+          <a:p>
+            <a:endParaRPr lang="en-US"/>
+          </a:p>
+        </p:txBody>
       </p:sp>
       <p:sp>
         <p:nvSpPr>
@@ -3608,6 +3773,13 @@
             <a:tailEnd type="triangle"/>
           </a:ln>
         </p:spPr>
+        <p:txBody>
+          <a:bodyPr/>
+          <a:lstStyle/>
+          <a:p>
+            <a:endParaRPr lang="en-US"/>
+          </a:p>
+        </p:txBody>
       </p:sp>
       <p:sp>
         <p:nvSpPr>
@@ -3633,6 +3805,13 @@
             <a:prstDash val="solid"/>
           </a:ln>
         </p:spPr>
+        <p:txBody>
+          <a:bodyPr/>
+          <a:lstStyle/>
+          <a:p>
+            <a:endParaRPr lang="en-US"/>
+          </a:p>
+        </p:txBody>
       </p:sp>
       <p:sp>
         <p:nvSpPr>
@@ -3657,7 +3836,7 @@
           </a:bodyPr>
           <a:lstStyle/>
           <a:p>
-            <a:pPr algn="ctr" indent="0" marL="0">
+            <a:pPr marL="0" indent="0" algn="ctr">
               <a:buNone/>
             </a:pPr>
             <a:r>
@@ -3699,6 +3878,13 @@
             <a:prstDash val="solid"/>
           </a:ln>
         </p:spPr>
+        <p:txBody>
+          <a:bodyPr/>
+          <a:lstStyle/>
+          <a:p>
+            <a:endParaRPr lang="en-US"/>
+          </a:p>
+        </p:txBody>
       </p:sp>
       <p:sp>
         <p:nvSpPr>
@@ -3723,7 +3909,7 @@
           </a:bodyPr>
           <a:lstStyle/>
           <a:p>
-            <a:pPr algn="ctr" indent="0" marL="0">
+            <a:pPr marL="0" indent="0" algn="ctr">
               <a:buNone/>
             </a:pPr>
             <a:r>
@@ -3765,6 +3951,13 @@
             <a:prstDash val="solid"/>
           </a:ln>
         </p:spPr>
+        <p:txBody>
+          <a:bodyPr/>
+          <a:lstStyle/>
+          <a:p>
+            <a:endParaRPr lang="en-US"/>
+          </a:p>
+        </p:txBody>
       </p:sp>
       <p:sp>
         <p:nvSpPr>
@@ -3790,6 +3983,13 @@
             <a:prstDash val="solid"/>
           </a:ln>
         </p:spPr>
+        <p:txBody>
+          <a:bodyPr/>
+          <a:lstStyle/>
+          <a:p>
+            <a:endParaRPr lang="en-US"/>
+          </a:p>
+        </p:txBody>
       </p:sp>
       <p:sp>
         <p:nvSpPr>
@@ -3814,7 +4014,7 @@
           </a:bodyPr>
           <a:lstStyle/>
           <a:p>
-            <a:pPr indent="0" marL="0">
+            <a:pPr marL="0" indent="0">
               <a:buNone/>
             </a:pPr>
             <a:r>
@@ -3855,7 +4055,7 @@
           </a:bodyPr>
           <a:lstStyle/>
           <a:p>
-            <a:pPr indent="0" marL="0">
+            <a:pPr marL="0" indent="0">
               <a:buNone/>
             </a:pPr>
             <a:r>
@@ -3897,6 +4097,13 @@
             <a:prstDash val="solid"/>
           </a:ln>
         </p:spPr>
+        <p:txBody>
+          <a:bodyPr/>
+          <a:lstStyle/>
+          <a:p>
+            <a:endParaRPr lang="en-US"/>
+          </a:p>
+        </p:txBody>
       </p:sp>
       <p:sp>
         <p:nvSpPr>
@@ -3922,6 +4129,13 @@
             <a:prstDash val="solid"/>
           </a:ln>
         </p:spPr>
+        <p:txBody>
+          <a:bodyPr/>
+          <a:lstStyle/>
+          <a:p>
+            <a:endParaRPr lang="en-US"/>
+          </a:p>
+        </p:txBody>
       </p:sp>
       <p:sp>
         <p:nvSpPr>
@@ -3946,7 +4160,7 @@
           </a:bodyPr>
           <a:lstStyle/>
           <a:p>
-            <a:pPr indent="0" marL="0">
+            <a:pPr marL="0" indent="0">
               <a:buNone/>
             </a:pPr>
             <a:r>
@@ -3987,7 +4201,7 @@
           </a:bodyPr>
           <a:lstStyle/>
           <a:p>
-            <a:pPr indent="0" marL="0">
+            <a:pPr marL="0" indent="0">
               <a:buNone/>
             </a:pPr>
             <a:r>
@@ -4029,6 +4243,13 @@
             <a:prstDash val="solid"/>
           </a:ln>
         </p:spPr>
+        <p:txBody>
+          <a:bodyPr/>
+          <a:lstStyle/>
+          <a:p>
+            <a:endParaRPr lang="en-US"/>
+          </a:p>
+        </p:txBody>
       </p:sp>
       <p:sp>
         <p:nvSpPr>
@@ -4054,6 +4275,13 @@
             <a:prstDash val="solid"/>
           </a:ln>
         </p:spPr>
+        <p:txBody>
+          <a:bodyPr/>
+          <a:lstStyle/>
+          <a:p>
+            <a:endParaRPr lang="en-US"/>
+          </a:p>
+        </p:txBody>
       </p:sp>
       <p:sp>
         <p:nvSpPr>
@@ -4078,7 +4306,7 @@
           </a:bodyPr>
           <a:lstStyle/>
           <a:p>
-            <a:pPr indent="0" marL="0">
+            <a:pPr marL="0" indent="0">
               <a:buNone/>
             </a:pPr>
             <a:r>
@@ -4115,11 +4343,11 @@
         </p:spPr>
         <p:txBody>
           <a:bodyPr wrap="square" lIns="0" tIns="0" rIns="0" bIns="0" rtlCol="0" anchor="t">
-            <a:normAutofit/>
+            <a:normAutofit fontScale="92500" lnSpcReduction="10000"/>
           </a:bodyPr>
           <a:lstStyle/>
           <a:p>
-            <a:pPr indent="0" marL="0">
+            <a:pPr marL="0" indent="0">
               <a:buNone/>
             </a:pPr>
             <a:r>
@@ -4139,7 +4367,7 @@
       </p:sp>
       <p:sp>
         <p:nvSpPr>
-          <p:cNvPr id="25" name="Slide Number Placeholder 0"/>
+          <p:cNvPr id="35" name="Slide Number Placeholder 0"/>
           <p:cNvSpPr>
             <a:spLocks noGrp="1"/>
           </p:cNvSpPr>
@@ -4157,7 +4385,7 @@
           </a:prstGeom>
           <a:extLst>
             <a:ext uri="{C572A759-6A51-4108-AA02-DFA0A04FC94B}">
-              <ma14:wrappingTextBoxFlag xmlns:ma14="http://schemas.microsoft.com/office/mac/drawingml/2011/main" val="0"/>
+              <ma14:wrappingTextBoxFlag xmlns:ma14="http://schemas.microsoft.com/office/mac/drawingml/2011/main" xmlns="" val="0"/>
             </a:ext>
           </a:extLst>
         </p:spPr>
@@ -4178,8 +4406,8 @@
           <a:p>
             <a:pPr algn="r"/>
             <a:fld id="{F7021451-1387-4CA6-816F-3879F97B5CBC}" type="slidenum">
-              <a:rPr b="0" lang="en-US"/>
-              <a:t>10</a:t>
+              <a:rPr lang="en-US" b="0"/>
+              <a:t>11</a:t>
             </a:fld>
             <a:endParaRPr lang="en-US"/>
           </a:p>
@@ -4193,7 +4421,7 @@
 </p:sld>
 </file>
 
-<file path=ppt/slides/slide11.xml><?xml version="1.0" encoding="utf-8"?>
+<file path=ppt/slides/slide12.xml><?xml version="1.0" encoding="utf-8"?>
 <p:sld xmlns:a="http://schemas.openxmlformats.org/drawingml/2006/main" xmlns:r="http://schemas.openxmlformats.org/officeDocument/2006/relationships" xmlns:p="http://schemas.openxmlformats.org/presentationml/2006/main">
   <p:cSld name="Slide 11">
     <p:spTree>
@@ -4233,7 +4461,7 @@
           </a:bodyPr>
           <a:lstStyle/>
           <a:p>
-            <a:pPr indent="0" marL="0">
+            <a:pPr marL="0" indent="0">
               <a:buNone/>
             </a:pPr>
             <a:r>
@@ -4274,7 +4502,7 @@
           </a:bodyPr>
           <a:lstStyle/>
           <a:p>
-            <a:pPr indent="0" marL="0">
+            <a:pPr marL="0" indent="0">
               <a:buNone/>
             </a:pPr>
             <a:r>
@@ -4316,6 +4544,13 @@
             <a:prstDash val="solid"/>
           </a:ln>
         </p:spPr>
+        <p:txBody>
+          <a:bodyPr/>
+          <a:lstStyle/>
+          <a:p>
+            <a:endParaRPr lang="en-US"/>
+          </a:p>
+        </p:txBody>
       </p:sp>
       <p:sp>
         <p:nvSpPr>
@@ -4340,7 +4575,7 @@
           </a:bodyPr>
           <a:lstStyle/>
           <a:p>
-            <a:pPr algn="ctr" indent="0" marL="0">
+            <a:pPr marL="0" indent="0" algn="ctr">
               <a:buNone/>
             </a:pPr>
             <a:r>
@@ -4382,6 +4617,13 @@
             <a:prstDash val="solid"/>
           </a:ln>
         </p:spPr>
+        <p:txBody>
+          <a:bodyPr/>
+          <a:lstStyle/>
+          <a:p>
+            <a:endParaRPr lang="en-US"/>
+          </a:p>
+        </p:txBody>
       </p:sp>
       <p:sp>
         <p:nvSpPr>
@@ -4406,7 +4648,7 @@
           </a:bodyPr>
           <a:lstStyle/>
           <a:p>
-            <a:pPr algn="ctr" indent="0" marL="0">
+            <a:pPr marL="0" indent="0" algn="ctr">
               <a:buNone/>
             </a:pPr>
             <a:r>
@@ -4448,6 +4690,13 @@
             <a:tailEnd type="triangle"/>
           </a:ln>
         </p:spPr>
+        <p:txBody>
+          <a:bodyPr/>
+          <a:lstStyle/>
+          <a:p>
+            <a:endParaRPr lang="en-US"/>
+          </a:p>
+        </p:txBody>
       </p:sp>
       <p:sp>
         <p:nvSpPr>
@@ -4473,6 +4722,13 @@
             <a:tailEnd type="triangle"/>
           </a:ln>
         </p:spPr>
+        <p:txBody>
+          <a:bodyPr/>
+          <a:lstStyle/>
+          <a:p>
+            <a:endParaRPr lang="en-US"/>
+          </a:p>
+        </p:txBody>
       </p:sp>
       <p:sp>
         <p:nvSpPr>
@@ -4498,6 +4754,13 @@
             <a:prstDash val="solid"/>
           </a:ln>
         </p:spPr>
+        <p:txBody>
+          <a:bodyPr/>
+          <a:lstStyle/>
+          <a:p>
+            <a:endParaRPr lang="en-US"/>
+          </a:p>
+        </p:txBody>
       </p:sp>
       <p:sp>
         <p:nvSpPr>
@@ -4522,7 +4785,7 @@
           </a:bodyPr>
           <a:lstStyle/>
           <a:p>
-            <a:pPr algn="ctr" indent="0" marL="0">
+            <a:pPr marL="0" indent="0" algn="ctr">
               <a:buNone/>
             </a:pPr>
             <a:r>
@@ -4564,6 +4827,13 @@
             <a:prstDash val="solid"/>
           </a:ln>
         </p:spPr>
+        <p:txBody>
+          <a:bodyPr/>
+          <a:lstStyle/>
+          <a:p>
+            <a:endParaRPr lang="en-US"/>
+          </a:p>
+        </p:txBody>
       </p:sp>
       <p:sp>
         <p:nvSpPr>
@@ -4588,7 +4858,7 @@
           </a:bodyPr>
           <a:lstStyle/>
           <a:p>
-            <a:pPr algn="ctr" indent="0" marL="0">
+            <a:pPr marL="0" indent="0" algn="ctr">
               <a:buNone/>
             </a:pPr>
             <a:r>
@@ -4630,6 +4900,13 @@
             <a:tailEnd type="triangle"/>
           </a:ln>
         </p:spPr>
+        <p:txBody>
+          <a:bodyPr/>
+          <a:lstStyle/>
+          <a:p>
+            <a:endParaRPr lang="en-US"/>
+          </a:p>
+        </p:txBody>
       </p:sp>
       <p:sp>
         <p:nvSpPr>
@@ -4655,6 +4932,13 @@
             <a:tailEnd type="triangle"/>
           </a:ln>
         </p:spPr>
+        <p:txBody>
+          <a:bodyPr/>
+          <a:lstStyle/>
+          <a:p>
+            <a:endParaRPr lang="en-US"/>
+          </a:p>
+        </p:txBody>
       </p:sp>
       <p:sp>
         <p:nvSpPr>
@@ -4680,6 +4964,13 @@
             <a:prstDash val="solid"/>
           </a:ln>
         </p:spPr>
+        <p:txBody>
+          <a:bodyPr/>
+          <a:lstStyle/>
+          <a:p>
+            <a:endParaRPr lang="en-US"/>
+          </a:p>
+        </p:txBody>
       </p:sp>
       <p:sp>
         <p:nvSpPr>
@@ -4704,7 +4995,7 @@
           </a:bodyPr>
           <a:lstStyle/>
           <a:p>
-            <a:pPr algn="ctr" indent="0" marL="0">
+            <a:pPr marL="0" indent="0" algn="ctr">
               <a:buNone/>
             </a:pPr>
             <a:r>
@@ -4746,6 +5037,13 @@
             <a:prstDash val="solid"/>
           </a:ln>
         </p:spPr>
+        <p:txBody>
+          <a:bodyPr/>
+          <a:lstStyle/>
+          <a:p>
+            <a:endParaRPr lang="en-US"/>
+          </a:p>
+        </p:txBody>
       </p:sp>
       <p:sp>
         <p:nvSpPr>
@@ -4770,7 +5068,7 @@
           </a:bodyPr>
           <a:lstStyle/>
           <a:p>
-            <a:pPr algn="ctr" indent="0" marL="0">
+            <a:pPr marL="0" indent="0" algn="ctr">
               <a:buNone/>
             </a:pPr>
             <a:r>
@@ -4812,6 +5110,13 @@
             <a:tailEnd type="triangle"/>
           </a:ln>
         </p:spPr>
+        <p:txBody>
+          <a:bodyPr/>
+          <a:lstStyle/>
+          <a:p>
+            <a:endParaRPr lang="en-US"/>
+          </a:p>
+        </p:txBody>
       </p:sp>
       <p:sp>
         <p:nvSpPr>
@@ -4837,6 +5142,13 @@
             <a:tailEnd type="triangle"/>
           </a:ln>
         </p:spPr>
+        <p:txBody>
+          <a:bodyPr/>
+          <a:lstStyle/>
+          <a:p>
+            <a:endParaRPr lang="en-US"/>
+          </a:p>
+        </p:txBody>
       </p:sp>
       <p:sp>
         <p:nvSpPr>
@@ -4862,6 +5174,13 @@
             <a:prstDash val="solid"/>
           </a:ln>
         </p:spPr>
+        <p:txBody>
+          <a:bodyPr/>
+          <a:lstStyle/>
+          <a:p>
+            <a:endParaRPr lang="en-US"/>
+          </a:p>
+        </p:txBody>
       </p:sp>
       <p:sp>
         <p:nvSpPr>
@@ -4886,7 +5205,7 @@
           </a:bodyPr>
           <a:lstStyle/>
           <a:p>
-            <a:pPr algn="ctr" indent="0" marL="0">
+            <a:pPr marL="0" indent="0" algn="ctr">
               <a:buNone/>
             </a:pPr>
             <a:r>
@@ -4928,6 +5247,13 @@
             <a:tailEnd type="triangle"/>
           </a:ln>
         </p:spPr>
+        <p:txBody>
+          <a:bodyPr/>
+          <a:lstStyle/>
+          <a:p>
+            <a:endParaRPr lang="en-US"/>
+          </a:p>
+        </p:txBody>
       </p:sp>
       <p:sp>
         <p:nvSpPr>
@@ -4953,6 +5279,13 @@
             <a:prstDash val="solid"/>
           </a:ln>
         </p:spPr>
+        <p:txBody>
+          <a:bodyPr/>
+          <a:lstStyle/>
+          <a:p>
+            <a:endParaRPr lang="en-US"/>
+          </a:p>
+        </p:txBody>
       </p:sp>
       <p:sp>
         <p:nvSpPr>
@@ -4977,7 +5310,7 @@
           </a:bodyPr>
           <a:lstStyle/>
           <a:p>
-            <a:pPr algn="ctr" indent="0" marL="0">
+            <a:pPr marL="0" indent="0" algn="ctr">
               <a:buNone/>
             </a:pPr>
             <a:r>
@@ -5019,6 +5352,13 @@
             <a:prstDash val="solid"/>
           </a:ln>
         </p:spPr>
+        <p:txBody>
+          <a:bodyPr/>
+          <a:lstStyle/>
+          <a:p>
+            <a:endParaRPr lang="en-US"/>
+          </a:p>
+        </p:txBody>
       </p:sp>
       <p:sp>
         <p:nvSpPr>
@@ -5043,7 +5383,7 @@
           </a:bodyPr>
           <a:lstStyle/>
           <a:p>
-            <a:pPr algn="ctr" indent="0" marL="0">
+            <a:pPr marL="0" indent="0" algn="ctr">
               <a:buNone/>
             </a:pPr>
             <a:r>
@@ -5063,7 +5403,7 @@
       </p:sp>
       <p:sp>
         <p:nvSpPr>
-          <p:cNvPr id="25" name="Slide Number Placeholder 0"/>
+          <p:cNvPr id="29" name="Slide Number Placeholder 0"/>
           <p:cNvSpPr>
             <a:spLocks noGrp="1"/>
           </p:cNvSpPr>
@@ -5081,7 +5421,7 @@
           </a:prstGeom>
           <a:extLst>
             <a:ext uri="{C572A759-6A51-4108-AA02-DFA0A04FC94B}">
-              <ma14:wrappingTextBoxFlag xmlns:ma14="http://schemas.microsoft.com/office/mac/drawingml/2011/main" val="0"/>
+              <ma14:wrappingTextBoxFlag xmlns:ma14="http://schemas.microsoft.com/office/mac/drawingml/2011/main" xmlns="" val="0"/>
             </a:ext>
           </a:extLst>
         </p:spPr>
@@ -5102,8 +5442,8 @@
           <a:p>
             <a:pPr algn="r"/>
             <a:fld id="{F7021451-1387-4CA6-816F-3879F97B5CBC}" type="slidenum">
-              <a:rPr b="0" lang="en-US"/>
-              <a:t>11</a:t>
+              <a:rPr lang="en-US" b="0"/>
+              <a:t>12</a:t>
             </a:fld>
             <a:endParaRPr lang="en-US"/>
           </a:p>
@@ -5117,7 +5457,7 @@
 </p:sld>
 </file>
 
-<file path=ppt/slides/slide12.xml><?xml version="1.0" encoding="utf-8"?>
+<file path=ppt/slides/slide13.xml><?xml version="1.0" encoding="utf-8"?>
 <p:sld xmlns:a="http://schemas.openxmlformats.org/drawingml/2006/main" xmlns:r="http://schemas.openxmlformats.org/officeDocument/2006/relationships" xmlns:p="http://schemas.openxmlformats.org/presentationml/2006/main">
   <p:cSld name="Slide 12">
     <p:spTree>
@@ -5157,7 +5497,7 @@
           </a:bodyPr>
           <a:lstStyle/>
           <a:p>
-            <a:pPr indent="0" marL="0">
+            <a:pPr marL="0" indent="0">
               <a:buNone/>
             </a:pPr>
             <a:r>
@@ -5198,7 +5538,7 @@
           </a:bodyPr>
           <a:lstStyle/>
           <a:p>
-            <a:pPr indent="0" marL="0">
+            <a:pPr marL="0" indent="0">
               <a:buNone/>
             </a:pPr>
             <a:r>
@@ -5240,6 +5580,13 @@
             <a:prstDash val="solid"/>
           </a:ln>
         </p:spPr>
+        <p:txBody>
+          <a:bodyPr/>
+          <a:lstStyle/>
+          <a:p>
+            <a:endParaRPr lang="en-US"/>
+          </a:p>
+        </p:txBody>
       </p:sp>
       <p:sp>
         <p:nvSpPr>
@@ -5264,7 +5611,7 @@
           </a:bodyPr>
           <a:lstStyle/>
           <a:p>
-            <a:pPr algn="ctr" indent="0" marL="0">
+            <a:pPr marL="0" indent="0" algn="ctr">
               <a:buNone/>
             </a:pPr>
             <a:r>
@@ -5306,6 +5653,13 @@
             <a:prstDash val="solid"/>
           </a:ln>
         </p:spPr>
+        <p:txBody>
+          <a:bodyPr/>
+          <a:lstStyle/>
+          <a:p>
+            <a:endParaRPr lang="en-US"/>
+          </a:p>
+        </p:txBody>
       </p:sp>
       <p:sp>
         <p:nvSpPr>
@@ -5330,7 +5684,7 @@
           </a:bodyPr>
           <a:lstStyle/>
           <a:p>
-            <a:pPr algn="ctr" indent="0" marL="0">
+            <a:pPr marL="0" indent="0" algn="ctr">
               <a:buNone/>
             </a:pPr>
             <a:r>
@@ -5372,6 +5726,13 @@
             <a:prstDash val="solid"/>
           </a:ln>
         </p:spPr>
+        <p:txBody>
+          <a:bodyPr/>
+          <a:lstStyle/>
+          <a:p>
+            <a:endParaRPr lang="en-US"/>
+          </a:p>
+        </p:txBody>
       </p:sp>
       <p:sp>
         <p:nvSpPr>
@@ -5397,6 +5758,13 @@
             <a:prstDash val="solid"/>
           </a:ln>
         </p:spPr>
+        <p:txBody>
+          <a:bodyPr/>
+          <a:lstStyle/>
+          <a:p>
+            <a:endParaRPr lang="en-US"/>
+          </a:p>
+        </p:txBody>
       </p:sp>
       <p:sp>
         <p:nvSpPr>
@@ -5421,7 +5789,7 @@
           </a:bodyPr>
           <a:lstStyle/>
           <a:p>
-            <a:pPr indent="0" marL="0">
+            <a:pPr marL="0" indent="0">
               <a:buNone/>
             </a:pPr>
             <a:r>
@@ -5462,7 +5830,7 @@
           </a:bodyPr>
           <a:lstStyle/>
           <a:p>
-            <a:pPr indent="0" marL="0">
+            <a:pPr marL="0" indent="0">
               <a:buNone/>
             </a:pPr>
             <a:r>
@@ -5504,6 +5872,13 @@
             <a:prstDash val="solid"/>
           </a:ln>
         </p:spPr>
+        <p:txBody>
+          <a:bodyPr/>
+          <a:lstStyle/>
+          <a:p>
+            <a:endParaRPr lang="en-US"/>
+          </a:p>
+        </p:txBody>
       </p:sp>
       <p:sp>
         <p:nvSpPr>
@@ -5529,6 +5904,13 @@
             <a:prstDash val="solid"/>
           </a:ln>
         </p:spPr>
+        <p:txBody>
+          <a:bodyPr/>
+          <a:lstStyle/>
+          <a:p>
+            <a:endParaRPr lang="en-US"/>
+          </a:p>
+        </p:txBody>
       </p:sp>
       <p:sp>
         <p:nvSpPr>
@@ -5553,7 +5935,7 @@
           </a:bodyPr>
           <a:lstStyle/>
           <a:p>
-            <a:pPr indent="0" marL="0">
+            <a:pPr marL="0" indent="0">
               <a:buNone/>
             </a:pPr>
             <a:r>
@@ -5594,7 +5976,7 @@
           </a:bodyPr>
           <a:lstStyle/>
           <a:p>
-            <a:pPr indent="0" marL="0">
+            <a:pPr marL="0" indent="0">
               <a:buNone/>
             </a:pPr>
             <a:r>
@@ -5636,6 +6018,13 @@
             <a:prstDash val="solid"/>
           </a:ln>
         </p:spPr>
+        <p:txBody>
+          <a:bodyPr/>
+          <a:lstStyle/>
+          <a:p>
+            <a:endParaRPr lang="en-US"/>
+          </a:p>
+        </p:txBody>
       </p:sp>
       <p:sp>
         <p:nvSpPr>
@@ -5661,6 +6050,13 @@
             <a:prstDash val="solid"/>
           </a:ln>
         </p:spPr>
+        <p:txBody>
+          <a:bodyPr/>
+          <a:lstStyle/>
+          <a:p>
+            <a:endParaRPr lang="en-US"/>
+          </a:p>
+        </p:txBody>
       </p:sp>
       <p:sp>
         <p:nvSpPr>
@@ -5685,7 +6081,7 @@
           </a:bodyPr>
           <a:lstStyle/>
           <a:p>
-            <a:pPr indent="0" marL="0">
+            <a:pPr marL="0" indent="0">
               <a:buNone/>
             </a:pPr>
             <a:r>
@@ -5722,11 +6118,11 @@
         </p:spPr>
         <p:txBody>
           <a:bodyPr wrap="square" lIns="0" tIns="0" rIns="0" bIns="0" rtlCol="0" anchor="t">
-            <a:normAutofit/>
+            <a:normAutofit fontScale="32500" lnSpcReduction="20000"/>
           </a:bodyPr>
           <a:lstStyle/>
           <a:p>
-            <a:pPr indent="0" marL="0">
+            <a:pPr marL="0" indent="0">
               <a:buNone/>
             </a:pPr>
             <a:r>
@@ -5764,7 +6160,7 @@
           </a:prstGeom>
           <a:extLst>
             <a:ext uri="{C572A759-6A51-4108-AA02-DFA0A04FC94B}">
-              <ma14:wrappingTextBoxFlag xmlns:ma14="http://schemas.microsoft.com/office/mac/drawingml/2011/main" val="0"/>
+              <ma14:wrappingTextBoxFlag xmlns:ma14="http://schemas.microsoft.com/office/mac/drawingml/2011/main" xmlns="" val="0"/>
             </a:ext>
           </a:extLst>
         </p:spPr>
@@ -5785,8 +6181,8 @@
           <a:p>
             <a:pPr algn="r"/>
             <a:fld id="{F7021451-1387-4CA6-816F-3879F97B5CBC}" type="slidenum">
-              <a:rPr b="0" lang="en-US"/>
-              <a:t>12</a:t>
+              <a:rPr lang="en-US" b="0"/>
+              <a:t>13</a:t>
             </a:fld>
             <a:endParaRPr lang="en-US"/>
           </a:p>
@@ -5800,7 +6196,7 @@
 </p:sld>
 </file>
 
-<file path=ppt/slides/slide13.xml><?xml version="1.0" encoding="utf-8"?>
+<file path=ppt/slides/slide14.xml><?xml version="1.0" encoding="utf-8"?>
 <p:sld xmlns:a="http://schemas.openxmlformats.org/drawingml/2006/main" xmlns:r="http://schemas.openxmlformats.org/officeDocument/2006/relationships" xmlns:p="http://schemas.openxmlformats.org/presentationml/2006/main">
   <p:cSld name="Slide 13">
     <p:spTree>
@@ -5840,7 +6236,7 @@
           </a:bodyPr>
           <a:lstStyle/>
           <a:p>
-            <a:pPr indent="0" marL="0">
+            <a:pPr marL="0" indent="0">
               <a:buNone/>
             </a:pPr>
             <a:r>
@@ -5881,7 +6277,7 @@
           </a:bodyPr>
           <a:lstStyle/>
           <a:p>
-            <a:pPr indent="0" marL="0">
+            <a:pPr marL="0" indent="0">
               <a:buNone/>
             </a:pPr>
             <a:r>
@@ -5923,6 +6319,13 @@
             <a:prstDash val="solid"/>
           </a:ln>
         </p:spPr>
+        <p:txBody>
+          <a:bodyPr/>
+          <a:lstStyle/>
+          <a:p>
+            <a:endParaRPr lang="en-US"/>
+          </a:p>
+        </p:txBody>
       </p:sp>
       <p:sp>
         <p:nvSpPr>
@@ -5947,7 +6350,7 @@
           </a:bodyPr>
           <a:lstStyle/>
           <a:p>
-            <a:pPr algn="ctr" indent="0" marL="0">
+            <a:pPr marL="0" indent="0" algn="ctr">
               <a:buNone/>
             </a:pPr>
             <a:r>
@@ -5989,6 +6392,13 @@
             <a:prstDash val="solid"/>
           </a:ln>
         </p:spPr>
+        <p:txBody>
+          <a:bodyPr/>
+          <a:lstStyle/>
+          <a:p>
+            <a:endParaRPr lang="en-US"/>
+          </a:p>
+        </p:txBody>
       </p:sp>
       <p:sp>
         <p:nvSpPr>
@@ -6013,7 +6423,7 @@
           </a:bodyPr>
           <a:lstStyle/>
           <a:p>
-            <a:pPr algn="ctr" indent="0" marL="0">
+            <a:pPr marL="0" indent="0" algn="ctr">
               <a:buNone/>
             </a:pPr>
             <a:r>
@@ -6055,6 +6465,13 @@
             <a:prstDash val="solid"/>
           </a:ln>
         </p:spPr>
+        <p:txBody>
+          <a:bodyPr/>
+          <a:lstStyle/>
+          <a:p>
+            <a:endParaRPr lang="en-US"/>
+          </a:p>
+        </p:txBody>
       </p:sp>
       <p:sp>
         <p:nvSpPr>
@@ -6079,7 +6496,7 @@
           </a:bodyPr>
           <a:lstStyle/>
           <a:p>
-            <a:pPr algn="ctr" indent="0" marL="0">
+            <a:pPr marL="0" indent="0" algn="ctr">
               <a:buNone/>
             </a:pPr>
             <a:r>
@@ -6121,6 +6538,13 @@
             <a:prstDash val="solid"/>
           </a:ln>
         </p:spPr>
+        <p:txBody>
+          <a:bodyPr/>
+          <a:lstStyle/>
+          <a:p>
+            <a:endParaRPr lang="en-US"/>
+          </a:p>
+        </p:txBody>
       </p:sp>
       <p:sp>
         <p:nvSpPr>
@@ -6145,7 +6569,7 @@
           </a:bodyPr>
           <a:lstStyle/>
           <a:p>
-            <a:pPr algn="ctr" indent="0" marL="0">
+            <a:pPr marL="0" indent="0" algn="ctr">
               <a:buNone/>
             </a:pPr>
             <a:r>
@@ -6165,14 +6589,14 @@
       </p:sp>
       <p:pic>
         <p:nvPicPr>
-          <p:cNvPr id="12" name="Image 0" descr="/mnt/data/week7_polyphase/assets/haar_reconstruction.png">    </p:cNvPr>
+          <p:cNvPr id="12" name="Image 0" descr="/mnt/data/week7_polyphase/assets/haar_reconstruction.png"/>
           <p:cNvPicPr>
             <a:picLocks noChangeAspect="1"/>
           </p:cNvPicPr>
           <p:nvPr/>
         </p:nvPicPr>
         <p:blipFill>
-          <a:blip r:embed="rId1"/>
+          <a:blip r:embed="rId3"/>
           <a:stretch>
             <a:fillRect/>
           </a:stretch>
@@ -6207,7 +6631,7 @@
           </a:prstGeom>
           <a:extLst>
             <a:ext uri="{C572A759-6A51-4108-AA02-DFA0A04FC94B}">
-              <ma14:wrappingTextBoxFlag xmlns:ma14="http://schemas.microsoft.com/office/mac/drawingml/2011/main" val="0"/>
+              <ma14:wrappingTextBoxFlag xmlns:ma14="http://schemas.microsoft.com/office/mac/drawingml/2011/main" xmlns="" val="0"/>
             </a:ext>
           </a:extLst>
         </p:spPr>
@@ -6228,8 +6652,8 @@
           <a:p>
             <a:pPr algn="r"/>
             <a:fld id="{F7021451-1387-4CA6-816F-3879F97B5CBC}" type="slidenum">
-              <a:rPr b="0" lang="en-US"/>
-              <a:t>13</a:t>
+              <a:rPr lang="en-US" b="0"/>
+              <a:t>14</a:t>
             </a:fld>
             <a:endParaRPr lang="en-US"/>
           </a:p>
@@ -6243,7 +6667,7 @@
 </p:sld>
 </file>
 
-<file path=ppt/slides/slide14.xml><?xml version="1.0" encoding="utf-8"?>
+<file path=ppt/slides/slide15.xml><?xml version="1.0" encoding="utf-8"?>
 <p:sld xmlns:a="http://schemas.openxmlformats.org/drawingml/2006/main" xmlns:r="http://schemas.openxmlformats.org/officeDocument/2006/relationships" xmlns:p="http://schemas.openxmlformats.org/presentationml/2006/main">
   <p:cSld name="Slide 14">
     <p:bg>
@@ -6251,6 +6675,7 @@
         <a:solidFill>
           <a:srgbClr val="17324D"/>
         </a:solidFill>
+        <a:effectLst/>
       </p:bgPr>
     </p:bg>
     <p:spTree>
@@ -6288,7 +6713,7 @@
           <a:bodyPr wrap="square" lIns="0" tIns="0" rIns="0" bIns="0" rtlCol="0" anchor="ctr"/>
           <a:lstStyle/>
           <a:p>
-            <a:pPr indent="0" marL="0">
+            <a:pPr marL="0" indent="0">
               <a:buNone/>
             </a:pPr>
             <a:r>
@@ -6329,7 +6754,7 @@
           </a:bodyPr>
           <a:lstStyle/>
           <a:p>
-            <a:pPr indent="0" marL="0">
+            <a:pPr marL="0" indent="0">
               <a:buNone/>
             </a:pPr>
             <a:r>
@@ -6368,7 +6793,7 @@
           <a:bodyPr wrap="square" lIns="0" tIns="0" rIns="0" bIns="0" rtlCol="0" anchor="ctr"/>
           <a:lstStyle/>
           <a:p>
-            <a:pPr indent="0" marL="0">
+            <a:pPr marL="0" indent="0">
               <a:buNone/>
             </a:pPr>
             <a:r>
@@ -6406,7 +6831,7 @@
           </a:prstGeom>
           <a:extLst>
             <a:ext uri="{C572A759-6A51-4108-AA02-DFA0A04FC94B}">
-              <ma14:wrappingTextBoxFlag xmlns:ma14="http://schemas.microsoft.com/office/mac/drawingml/2011/main" val="0"/>
+              <ma14:wrappingTextBoxFlag xmlns:ma14="http://schemas.microsoft.com/office/mac/drawingml/2011/main" xmlns="" val="0"/>
             </a:ext>
           </a:extLst>
         </p:spPr>
@@ -6427,8 +6852,8 @@
           <a:p>
             <a:pPr algn="r"/>
             <a:fld id="{F7021451-1387-4CA6-816F-3879F97B5CBC}" type="slidenum">
-              <a:rPr b="0" lang="en-US"/>
-              <a:t>14</a:t>
+              <a:rPr lang="en-US" b="0"/>
+              <a:t>15</a:t>
             </a:fld>
             <a:endParaRPr lang="en-US"/>
           </a:p>
@@ -6442,7 +6867,7 @@
 </p:sld>
 </file>
 
-<file path=ppt/slides/slide15.xml><?xml version="1.0" encoding="utf-8"?>
+<file path=ppt/slides/slide16.xml><?xml version="1.0" encoding="utf-8"?>
 <p:sld xmlns:a="http://schemas.openxmlformats.org/drawingml/2006/main" xmlns:r="http://schemas.openxmlformats.org/officeDocument/2006/relationships" xmlns:p="http://schemas.openxmlformats.org/presentationml/2006/main">
   <p:cSld name="Slide 15">
     <p:spTree>
@@ -6482,7 +6907,7 @@
           </a:bodyPr>
           <a:lstStyle/>
           <a:p>
-            <a:pPr indent="0" marL="0">
+            <a:pPr marL="0" indent="0">
               <a:buNone/>
             </a:pPr>
             <a:r>
@@ -6523,7 +6948,7 @@
           </a:bodyPr>
           <a:lstStyle/>
           <a:p>
-            <a:pPr indent="0" marL="0">
+            <a:pPr marL="0" indent="0">
               <a:buNone/>
             </a:pPr>
             <a:r>
@@ -6543,14 +6968,14 @@
       </p:sp>
       <p:pic>
         <p:nvPicPr>
-          <p:cNvPr id="4" name="Image 0" descr="/mnt/data/week7_polyphase/assets/fixed_filterbank.png">    </p:cNvPr>
+          <p:cNvPr id="4" name="Image 0" descr="/mnt/data/week7_polyphase/assets/fixed_filterbank.png"/>
           <p:cNvPicPr>
             <a:picLocks noChangeAspect="1"/>
           </p:cNvPicPr>
           <p:nvPr/>
         </p:nvPicPr>
         <p:blipFill>
-          <a:blip r:embed="rId1"/>
+          <a:blip r:embed="rId3"/>
           <a:stretch>
             <a:fillRect/>
           </a:stretch>
@@ -6589,6 +7014,13 @@
             <a:prstDash val="solid"/>
           </a:ln>
         </p:spPr>
+        <p:txBody>
+          <a:bodyPr/>
+          <a:lstStyle/>
+          <a:p>
+            <a:endParaRPr lang="en-US"/>
+          </a:p>
+        </p:txBody>
       </p:sp>
       <p:sp>
         <p:nvSpPr>
@@ -6614,6 +7046,13 @@
             <a:prstDash val="solid"/>
           </a:ln>
         </p:spPr>
+        <p:txBody>
+          <a:bodyPr/>
+          <a:lstStyle/>
+          <a:p>
+            <a:endParaRPr lang="en-US"/>
+          </a:p>
+        </p:txBody>
       </p:sp>
       <p:sp>
         <p:nvSpPr>
@@ -6638,7 +7077,7 @@
           </a:bodyPr>
           <a:lstStyle/>
           <a:p>
-            <a:pPr indent="0" marL="0">
+            <a:pPr marL="0" indent="0">
               <a:buNone/>
             </a:pPr>
             <a:r>
@@ -6679,7 +7118,7 @@
           </a:bodyPr>
           <a:lstStyle/>
           <a:p>
-            <a:pPr indent="0" marL="0">
+            <a:pPr marL="0" indent="0">
               <a:buNone/>
             </a:pPr>
             <a:r>
@@ -6721,6 +7160,13 @@
             <a:prstDash val="solid"/>
           </a:ln>
         </p:spPr>
+        <p:txBody>
+          <a:bodyPr/>
+          <a:lstStyle/>
+          <a:p>
+            <a:endParaRPr lang="en-US"/>
+          </a:p>
+        </p:txBody>
       </p:sp>
       <p:sp>
         <p:nvSpPr>
@@ -6746,6 +7192,13 @@
             <a:prstDash val="solid"/>
           </a:ln>
         </p:spPr>
+        <p:txBody>
+          <a:bodyPr/>
+          <a:lstStyle/>
+          <a:p>
+            <a:endParaRPr lang="en-US"/>
+          </a:p>
+        </p:txBody>
       </p:sp>
       <p:sp>
         <p:nvSpPr>
@@ -6770,7 +7223,7 @@
           </a:bodyPr>
           <a:lstStyle/>
           <a:p>
-            <a:pPr indent="0" marL="0">
+            <a:pPr marL="0" indent="0">
               <a:buNone/>
             </a:pPr>
             <a:r>
@@ -6811,7 +7264,7 @@
           </a:bodyPr>
           <a:lstStyle/>
           <a:p>
-            <a:pPr indent="0" marL="0">
+            <a:pPr marL="0" indent="0">
               <a:buNone/>
             </a:pPr>
             <a:r>
@@ -6853,6 +7306,13 @@
             <a:prstDash val="solid"/>
           </a:ln>
         </p:spPr>
+        <p:txBody>
+          <a:bodyPr/>
+          <a:lstStyle/>
+          <a:p>
+            <a:endParaRPr lang="en-US"/>
+          </a:p>
+        </p:txBody>
       </p:sp>
       <p:sp>
         <p:nvSpPr>
@@ -6878,6 +7338,13 @@
             <a:prstDash val="solid"/>
           </a:ln>
         </p:spPr>
+        <p:txBody>
+          <a:bodyPr/>
+          <a:lstStyle/>
+          <a:p>
+            <a:endParaRPr lang="en-US"/>
+          </a:p>
+        </p:txBody>
       </p:sp>
       <p:sp>
         <p:nvSpPr>
@@ -6902,7 +7369,7 @@
           </a:bodyPr>
           <a:lstStyle/>
           <a:p>
-            <a:pPr indent="0" marL="0">
+            <a:pPr marL="0" indent="0">
               <a:buNone/>
             </a:pPr>
             <a:r>
@@ -6943,7 +7410,7 @@
           </a:bodyPr>
           <a:lstStyle/>
           <a:p>
-            <a:pPr indent="0" marL="0">
+            <a:pPr marL="0" indent="0">
               <a:buNone/>
             </a:pPr>
             <a:r>
@@ -6981,7 +7448,7 @@
           </a:prstGeom>
           <a:extLst>
             <a:ext uri="{C572A759-6A51-4108-AA02-DFA0A04FC94B}">
-              <ma14:wrappingTextBoxFlag xmlns:ma14="http://schemas.microsoft.com/office/mac/drawingml/2011/main" val="0"/>
+              <ma14:wrappingTextBoxFlag xmlns:ma14="http://schemas.microsoft.com/office/mac/drawingml/2011/main" xmlns="" val="0"/>
             </a:ext>
           </a:extLst>
         </p:spPr>
@@ -7002,8 +7469,8 @@
           <a:p>
             <a:pPr algn="r"/>
             <a:fld id="{F7021451-1387-4CA6-816F-3879F97B5CBC}" type="slidenum">
-              <a:rPr b="0" lang="en-US"/>
-              <a:t>15</a:t>
+              <a:rPr lang="en-US" b="0"/>
+              <a:t>16</a:t>
             </a:fld>
             <a:endParaRPr lang="en-US"/>
           </a:p>
@@ -7017,7 +7484,7 @@
 </p:sld>
 </file>
 
-<file path=ppt/slides/slide16.xml><?xml version="1.0" encoding="utf-8"?>
+<file path=ppt/slides/slide17.xml><?xml version="1.0" encoding="utf-8"?>
 <p:sld xmlns:a="http://schemas.openxmlformats.org/drawingml/2006/main" xmlns:r="http://schemas.openxmlformats.org/officeDocument/2006/relationships" xmlns:p="http://schemas.openxmlformats.org/presentationml/2006/main">
   <p:cSld name="Slide 16">
     <p:spTree>
@@ -7057,7 +7524,7 @@
           </a:bodyPr>
           <a:lstStyle/>
           <a:p>
-            <a:pPr indent="0" marL="0">
+            <a:pPr marL="0" indent="0">
               <a:buNone/>
             </a:pPr>
             <a:r>
@@ -7098,7 +7565,7 @@
           </a:bodyPr>
           <a:lstStyle/>
           <a:p>
-            <a:pPr indent="0" marL="0">
+            <a:pPr marL="0" indent="0">
               <a:buNone/>
             </a:pPr>
             <a:r>
@@ -7140,6 +7607,13 @@
             <a:prstDash val="solid"/>
           </a:ln>
         </p:spPr>
+        <p:txBody>
+          <a:bodyPr/>
+          <a:lstStyle/>
+          <a:p>
+            <a:endParaRPr lang="en-US"/>
+          </a:p>
+        </p:txBody>
       </p:sp>
       <p:sp>
         <p:nvSpPr>
@@ -7164,7 +7638,7 @@
           </a:bodyPr>
           <a:lstStyle/>
           <a:p>
-            <a:pPr algn="ctr" indent="0" marL="0">
+            <a:pPr marL="0" indent="0" algn="ctr">
               <a:buNone/>
             </a:pPr>
             <a:r>
@@ -7302,6 +7776,13 @@
             <a:prstDash val="solid"/>
           </a:ln>
         </p:spPr>
+        <p:txBody>
+          <a:bodyPr/>
+          <a:lstStyle/>
+          <a:p>
+            <a:endParaRPr lang="en-US"/>
+          </a:p>
+        </p:txBody>
       </p:sp>
       <p:sp>
         <p:nvSpPr>
@@ -7327,6 +7808,13 @@
             <a:prstDash val="solid"/>
           </a:ln>
         </p:spPr>
+        <p:txBody>
+          <a:bodyPr/>
+          <a:lstStyle/>
+          <a:p>
+            <a:endParaRPr lang="en-US"/>
+          </a:p>
+        </p:txBody>
       </p:sp>
       <p:sp>
         <p:nvSpPr>
@@ -7351,7 +7839,7 @@
           </a:bodyPr>
           <a:lstStyle/>
           <a:p>
-            <a:pPr indent="0" marL="0">
+            <a:pPr marL="0" indent="0">
               <a:buNone/>
             </a:pPr>
             <a:r>
@@ -7392,7 +7880,7 @@
           </a:bodyPr>
           <a:lstStyle/>
           <a:p>
-            <a:pPr indent="0" marL="0">
+            <a:pPr marL="0" indent="0">
               <a:buNone/>
             </a:pPr>
             <a:r>
@@ -7434,6 +7922,13 @@
             <a:prstDash val="solid"/>
           </a:ln>
         </p:spPr>
+        <p:txBody>
+          <a:bodyPr/>
+          <a:lstStyle/>
+          <a:p>
+            <a:endParaRPr lang="en-US"/>
+          </a:p>
+        </p:txBody>
       </p:sp>
       <p:sp>
         <p:nvSpPr>
@@ -7459,6 +7954,13 @@
             <a:prstDash val="solid"/>
           </a:ln>
         </p:spPr>
+        <p:txBody>
+          <a:bodyPr/>
+          <a:lstStyle/>
+          <a:p>
+            <a:endParaRPr lang="en-US"/>
+          </a:p>
+        </p:txBody>
       </p:sp>
       <p:sp>
         <p:nvSpPr>
@@ -7483,7 +7985,7 @@
           </a:bodyPr>
           <a:lstStyle/>
           <a:p>
-            <a:pPr indent="0" marL="0">
+            <a:pPr marL="0" indent="0">
               <a:buNone/>
             </a:pPr>
             <a:r>
@@ -7524,7 +8026,7 @@
           </a:bodyPr>
           <a:lstStyle/>
           <a:p>
-            <a:pPr indent="0" marL="0">
+            <a:pPr marL="0" indent="0">
               <a:buNone/>
             </a:pPr>
             <a:r>
@@ -7562,7 +8064,7 @@
           </a:prstGeom>
           <a:extLst>
             <a:ext uri="{C572A759-6A51-4108-AA02-DFA0A04FC94B}">
-              <ma14:wrappingTextBoxFlag xmlns:ma14="http://schemas.microsoft.com/office/mac/drawingml/2011/main" val="0"/>
+              <ma14:wrappingTextBoxFlag xmlns:ma14="http://schemas.microsoft.com/office/mac/drawingml/2011/main" xmlns="" val="0"/>
             </a:ext>
           </a:extLst>
         </p:spPr>
@@ -7583,8 +8085,8 @@
           <a:p>
             <a:pPr algn="r"/>
             <a:fld id="{F7021451-1387-4CA6-816F-3879F97B5CBC}" type="slidenum">
-              <a:rPr b="0" lang="en-US"/>
-              <a:t>16</a:t>
+              <a:rPr lang="en-US" b="0"/>
+              <a:t>17</a:t>
             </a:fld>
             <a:endParaRPr lang="en-US"/>
           </a:p>
@@ -7598,7 +8100,7 @@
 </p:sld>
 </file>
 
-<file path=ppt/slides/slide17.xml><?xml version="1.0" encoding="utf-8"?>
+<file path=ppt/slides/slide18.xml><?xml version="1.0" encoding="utf-8"?>
 <p:sld xmlns:a="http://schemas.openxmlformats.org/drawingml/2006/main" xmlns:r="http://schemas.openxmlformats.org/officeDocument/2006/relationships" xmlns:p="http://schemas.openxmlformats.org/presentationml/2006/main">
   <p:cSld name="Slide 17">
     <p:spTree>
@@ -7638,7 +8140,7 @@
           </a:bodyPr>
           <a:lstStyle/>
           <a:p>
-            <a:pPr indent="0" marL="0">
+            <a:pPr marL="0" indent="0">
               <a:buNone/>
             </a:pPr>
             <a:r>
@@ -7679,7 +8181,7 @@
           </a:bodyPr>
           <a:lstStyle/>
           <a:p>
-            <a:pPr indent="0" marL="0">
+            <a:pPr marL="0" indent="0">
               <a:buNone/>
             </a:pPr>
             <a:r>
@@ -7699,14 +8201,14 @@
       </p:sp>
       <p:pic>
         <p:nvPicPr>
-          <p:cNvPr id="4" name="Image 0" descr="/mnt/data/week7_polyphase/assets/subband_feature_heatmap.png">    </p:cNvPr>
+          <p:cNvPr id="4" name="Image 0" descr="/mnt/data/week7_polyphase/assets/subband_feature_heatmap.png"/>
           <p:cNvPicPr>
             <a:picLocks noChangeAspect="1"/>
           </p:cNvPicPr>
           <p:nvPr/>
         </p:nvPicPr>
         <p:blipFill>
-          <a:blip r:embed="rId1"/>
+          <a:blip r:embed="rId3"/>
           <a:stretch>
             <a:fillRect/>
           </a:stretch>
@@ -7859,6 +8361,13 @@
             <a:prstDash val="solid"/>
           </a:ln>
         </p:spPr>
+        <p:txBody>
+          <a:bodyPr/>
+          <a:lstStyle/>
+          <a:p>
+            <a:endParaRPr lang="en-US"/>
+          </a:p>
+        </p:txBody>
       </p:sp>
       <p:sp>
         <p:nvSpPr>
@@ -7884,6 +8393,13 @@
             <a:prstDash val="solid"/>
           </a:ln>
         </p:spPr>
+        <p:txBody>
+          <a:bodyPr/>
+          <a:lstStyle/>
+          <a:p>
+            <a:endParaRPr lang="en-US"/>
+          </a:p>
+        </p:txBody>
       </p:sp>
       <p:sp>
         <p:nvSpPr>
@@ -7908,7 +8424,7 @@
           </a:bodyPr>
           <a:lstStyle/>
           <a:p>
-            <a:pPr indent="0" marL="0">
+            <a:pPr marL="0" indent="0">
               <a:buNone/>
             </a:pPr>
             <a:r>
@@ -7945,11 +8461,11 @@
         </p:spPr>
         <p:txBody>
           <a:bodyPr wrap="square" lIns="0" tIns="0" rIns="0" bIns="0" rtlCol="0" anchor="t">
-            <a:normAutofit/>
+            <a:normAutofit fontScale="32500" lnSpcReduction="20000"/>
           </a:bodyPr>
           <a:lstStyle/>
           <a:p>
-            <a:pPr indent="0" marL="0">
+            <a:pPr marL="0" indent="0">
               <a:buNone/>
             </a:pPr>
             <a:r>
@@ -7987,7 +8503,7 @@
           </a:prstGeom>
           <a:extLst>
             <a:ext uri="{C572A759-6A51-4108-AA02-DFA0A04FC94B}">
-              <ma14:wrappingTextBoxFlag xmlns:ma14="http://schemas.microsoft.com/office/mac/drawingml/2011/main" val="0"/>
+              <ma14:wrappingTextBoxFlag xmlns:ma14="http://schemas.microsoft.com/office/mac/drawingml/2011/main" xmlns="" val="0"/>
             </a:ext>
           </a:extLst>
         </p:spPr>
@@ -8008,8 +8524,8 @@
           <a:p>
             <a:pPr algn="r"/>
             <a:fld id="{F7021451-1387-4CA6-816F-3879F97B5CBC}" type="slidenum">
-              <a:rPr b="0" lang="en-US"/>
-              <a:t>17</a:t>
+              <a:rPr lang="en-US" b="0"/>
+              <a:t>18</a:t>
             </a:fld>
             <a:endParaRPr lang="en-US"/>
           </a:p>
@@ -8023,7 +8539,7 @@
 </p:sld>
 </file>
 
-<file path=ppt/slides/slide18.xml><?xml version="1.0" encoding="utf-8"?>
+<file path=ppt/slides/slide19.xml><?xml version="1.0" encoding="utf-8"?>
 <p:sld xmlns:a="http://schemas.openxmlformats.org/drawingml/2006/main" xmlns:r="http://schemas.openxmlformats.org/officeDocument/2006/relationships" xmlns:p="http://schemas.openxmlformats.org/presentationml/2006/main">
   <p:cSld name="Slide 18">
     <p:spTree>
@@ -8063,7 +8579,7 @@
           </a:bodyPr>
           <a:lstStyle/>
           <a:p>
-            <a:pPr indent="0" marL="0">
+            <a:pPr marL="0" indent="0">
               <a:buNone/>
             </a:pPr>
             <a:r>
@@ -8104,7 +8620,7 @@
           </a:bodyPr>
           <a:lstStyle/>
           <a:p>
-            <a:pPr indent="0" marL="0">
+            <a:pPr marL="0" indent="0">
               <a:buNone/>
             </a:pPr>
             <a:r>
@@ -8260,6 +8776,13 @@
             <a:prstDash val="solid"/>
           </a:ln>
         </p:spPr>
+        <p:txBody>
+          <a:bodyPr/>
+          <a:lstStyle/>
+          <a:p>
+            <a:endParaRPr lang="en-US"/>
+          </a:p>
+        </p:txBody>
       </p:sp>
       <p:sp>
         <p:nvSpPr>
@@ -8285,6 +8808,13 @@
             <a:prstDash val="solid"/>
           </a:ln>
         </p:spPr>
+        <p:txBody>
+          <a:bodyPr/>
+          <a:lstStyle/>
+          <a:p>
+            <a:endParaRPr lang="en-US"/>
+          </a:p>
+        </p:txBody>
       </p:sp>
       <p:sp>
         <p:nvSpPr>
@@ -8309,7 +8839,7 @@
           </a:bodyPr>
           <a:lstStyle/>
           <a:p>
-            <a:pPr indent="0" marL="0">
+            <a:pPr marL="0" indent="0">
               <a:buNone/>
             </a:pPr>
             <a:r>
@@ -8350,7 +8880,7 @@
           </a:bodyPr>
           <a:lstStyle/>
           <a:p>
-            <a:pPr indent="0" marL="0">
+            <a:pPr marL="0" indent="0">
               <a:buNone/>
             </a:pPr>
             <a:r>
@@ -8392,6 +8922,13 @@
             <a:prstDash val="solid"/>
           </a:ln>
         </p:spPr>
+        <p:txBody>
+          <a:bodyPr/>
+          <a:lstStyle/>
+          <a:p>
+            <a:endParaRPr lang="en-US"/>
+          </a:p>
+        </p:txBody>
       </p:sp>
       <p:sp>
         <p:nvSpPr>
@@ -8417,6 +8954,13 @@
             <a:prstDash val="solid"/>
           </a:ln>
         </p:spPr>
+        <p:txBody>
+          <a:bodyPr/>
+          <a:lstStyle/>
+          <a:p>
+            <a:endParaRPr lang="en-US"/>
+          </a:p>
+        </p:txBody>
       </p:sp>
       <p:sp>
         <p:nvSpPr>
@@ -8441,7 +8985,7 @@
           </a:bodyPr>
           <a:lstStyle/>
           <a:p>
-            <a:pPr indent="0" marL="0">
+            <a:pPr marL="0" indent="0">
               <a:buNone/>
             </a:pPr>
             <a:r>
@@ -8482,7 +9026,7 @@
           </a:bodyPr>
           <a:lstStyle/>
           <a:p>
-            <a:pPr indent="0" marL="0">
+            <a:pPr marL="0" indent="0">
               <a:buNone/>
             </a:pPr>
             <a:r>
@@ -8520,7 +9064,7 @@
           </a:prstGeom>
           <a:extLst>
             <a:ext uri="{C572A759-6A51-4108-AA02-DFA0A04FC94B}">
-              <ma14:wrappingTextBoxFlag xmlns:ma14="http://schemas.microsoft.com/office/mac/drawingml/2011/main" val="0"/>
+              <ma14:wrappingTextBoxFlag xmlns:ma14="http://schemas.microsoft.com/office/mac/drawingml/2011/main" xmlns="" val="0"/>
             </a:ext>
           </a:extLst>
         </p:spPr>
@@ -8541,258 +9085,7 @@
           <a:p>
             <a:pPr algn="r"/>
             <a:fld id="{F7021451-1387-4CA6-816F-3879F97B5CBC}" type="slidenum">
-              <a:rPr b="0" lang="en-US"/>
-              <a:t>18</a:t>
-            </a:fld>
-            <a:endParaRPr lang="en-US"/>
-          </a:p>
-        </p:txBody>
-      </p:sp>
-    </p:spTree>
-  </p:cSld>
-  <p:clrMapOvr>
-    <a:masterClrMapping/>
-  </p:clrMapOvr>
-</p:sld>
-</file>
-
-<file path=ppt/slides/slide19.xml><?xml version="1.0" encoding="utf-8"?>
-<p:sld xmlns:a="http://schemas.openxmlformats.org/drawingml/2006/main" xmlns:r="http://schemas.openxmlformats.org/officeDocument/2006/relationships" xmlns:p="http://schemas.openxmlformats.org/presentationml/2006/main">
-  <p:cSld name="Slide 19">
-    <p:spTree>
-      <p:nvGrpSpPr>
-        <p:cNvPr id="1" name=""/>
-        <p:cNvGrpSpPr/>
-        <p:nvPr/>
-      </p:nvGrpSpPr>
-      <p:grpSpPr>
-        <a:xfrm>
-          <a:off x="0" y="0"/>
-          <a:ext cx="0" cy="0"/>
-          <a:chOff x="0" y="0"/>
-          <a:chExt cx="0" cy="0"/>
-        </a:xfrm>
-      </p:grpSpPr>
-      <p:sp>
-        <p:nvSpPr>
-          <p:cNvPr id="2" name="Text 0"/>
-          <p:cNvSpPr/>
-          <p:nvPr/>
-        </p:nvSpPr>
-        <p:spPr>
-          <a:xfrm>
-            <a:off x="566928" y="310896"/>
-            <a:ext cx="11018520" cy="438912"/>
-          </a:xfrm>
-          <a:prstGeom prst="rect">
-            <a:avLst/>
-          </a:prstGeom>
-          <a:noFill/>
-          <a:ln/>
-        </p:spPr>
-        <p:txBody>
-          <a:bodyPr wrap="square" lIns="0" tIns="0" rIns="0" bIns="0" rtlCol="0" anchor="ctr">
-            <a:normAutofit/>
-          </a:bodyPr>
-          <a:lstStyle/>
-          <a:p>
-            <a:pPr indent="0" marL="0">
-              <a:buNone/>
-            </a:pPr>
-            <a:r>
-              <a:rPr lang="en-US" sz="2500" b="1" dirty="0">
-                <a:solidFill>
-                  <a:srgbClr val="17324D"/>
-                </a:solidFill>
-                <a:latin typeface="Aptos" pitchFamily="34" charset="0"/>
-                <a:ea typeface="Aptos" pitchFamily="34" charset="-122"/>
-                <a:cs typeface="Aptos" pitchFamily="34" charset="-120"/>
-              </a:rPr>
-              <a:t>References and instructor resources</a:t>
-            </a:r>
-            <a:endParaRPr lang="en-US" sz="2500" dirty="0"/>
-          </a:p>
-        </p:txBody>
-      </p:sp>
-      <p:sp>
-        <p:nvSpPr>
-          <p:cNvPr id="3" name="Text 1"/>
-          <p:cNvSpPr/>
-          <p:nvPr/>
-        </p:nvSpPr>
-        <p:spPr>
-          <a:xfrm>
-            <a:off x="585216" y="795528"/>
-            <a:ext cx="10744200" cy="292608"/>
-          </a:xfrm>
-          <a:prstGeom prst="rect">
-            <a:avLst/>
-          </a:prstGeom>
-          <a:noFill/>
-          <a:ln/>
-        </p:spPr>
-        <p:txBody>
-          <a:bodyPr wrap="square" lIns="0" tIns="0" rIns="0" bIns="0" rtlCol="0" anchor="ctr">
-            <a:normAutofit/>
-          </a:bodyPr>
-          <a:lstStyle/>
-          <a:p>
-            <a:pPr indent="0" marL="0">
-              <a:buNone/>
-            </a:pPr>
-            <a:r>
-              <a:rPr lang="en-US" sz="1150" dirty="0">
-                <a:solidFill>
-                  <a:srgbClr val="64748B"/>
-                </a:solidFill>
-                <a:latin typeface="Aptos" pitchFamily="34" charset="0"/>
-                <a:ea typeface="Aptos" pitchFamily="34" charset="-122"/>
-                <a:cs typeface="Aptos" pitchFamily="34" charset="-120"/>
-              </a:rPr>
-              <a:t>Week 7 • Lecture 14</a:t>
-            </a:r>
-            <a:endParaRPr lang="en-US" sz="1150" dirty="0"/>
-          </a:p>
-        </p:txBody>
-      </p:sp>
-      <p:sp>
-        <p:nvSpPr>
-          <p:cNvPr id="4" name="Text 2"/>
-          <p:cNvSpPr/>
-          <p:nvPr/>
-        </p:nvSpPr>
-        <p:spPr>
-          <a:xfrm>
-            <a:off x="914400" y="1417320"/>
-            <a:ext cx="9875520" cy="3017520"/>
-          </a:xfrm>
-          <a:prstGeom prst="rect">
-            <a:avLst/>
-          </a:prstGeom>
-          <a:noFill/>
-          <a:ln/>
-        </p:spPr>
-        <p:txBody>
-          <a:bodyPr wrap="square" lIns="635" tIns="635" rIns="635" bIns="635" rtlCol="0" anchor="ctr">
-            <a:normAutofit/>
-          </a:bodyPr>
-          <a:lstStyle/>
-          <a:p>
-            <a:pPr marL="228600" indent="-228600">
-              <a:buSzPct val="100000"/>
-              <a:buChar char="•"/>
-            </a:pPr>
-            <a:r>
-              <a:rPr lang="en-US" sz="1600" dirty="0">
-                <a:solidFill>
-                  <a:srgbClr val="1F2937"/>
-                </a:solidFill>
-                <a:latin typeface="Aptos" pitchFamily="34" charset="0"/>
-                <a:ea typeface="Aptos" pitchFamily="34" charset="-122"/>
-                <a:cs typeface="Aptos" pitchFamily="34" charset="-120"/>
-              </a:rPr>
-              <a:t>Oppenheim &amp; Schafer, Discrete-Time Signal Processing, §4.7–4.8: polyphase structures and filter banks.</a:t>
-            </a:r>
-            <a:endParaRPr lang="en-US" sz="1600" dirty="0"/>
-          </a:p>
-          <a:p>
-            <a:pPr marL="228600" indent="-228600">
-              <a:buSzPct val="100000"/>
-              <a:buChar char="•"/>
-            </a:pPr>
-            <a:r>
-              <a:rPr lang="en-US" sz="1600" dirty="0">
-                <a:solidFill>
-                  <a:srgbClr val="1F2937"/>
-                </a:solidFill>
-                <a:latin typeface="Aptos" pitchFamily="34" charset="0"/>
-                <a:ea typeface="Aptos" pitchFamily="34" charset="-122"/>
-                <a:cs typeface="Aptos" pitchFamily="34" charset="-120"/>
-              </a:rPr>
-              <a:t>Raschka et al., Machine Learning with PyTorch and Scikit-Learn: CNN architectures and feature-learning workflow.</a:t>
-            </a:r>
-            <a:endParaRPr lang="en-US" sz="1600" dirty="0"/>
-          </a:p>
-          <a:p>
-            <a:pPr marL="228600" indent="-228600">
-              <a:buSzPct val="100000"/>
-              <a:buChar char="•"/>
-            </a:pPr>
-            <a:r>
-              <a:rPr lang="en-US" sz="1600" dirty="0">
-                <a:solidFill>
-                  <a:srgbClr val="1F2937"/>
-                </a:solidFill>
-                <a:latin typeface="Aptos" pitchFamily="34" charset="0"/>
-                <a:ea typeface="Aptos" pitchFamily="34" charset="-122"/>
-                <a:cs typeface="Aptos" pitchFamily="34" charset="-120"/>
-              </a:rPr>
-              <a:t>Accompanying notebook: Week7_Polyphase_DSP_ML_Demos.ipynb.</a:t>
-            </a:r>
-            <a:endParaRPr lang="en-US" sz="1600" dirty="0"/>
-          </a:p>
-          <a:p>
-            <a:pPr marL="228600" indent="-228600">
-              <a:buSzPct val="100000"/>
-              <a:buChar char="•"/>
-            </a:pPr>
-            <a:r>
-              <a:rPr lang="en-US" sz="1600" dirty="0">
-                <a:solidFill>
-                  <a:srgbClr val="1F2937"/>
-                </a:solidFill>
-                <a:latin typeface="Aptos" pitchFamily="34" charset="0"/>
-                <a:ea typeface="Aptos" pitchFamily="34" charset="-122"/>
-                <a:cs typeface="Aptos" pitchFamily="34" charset="-120"/>
-              </a:rPr>
-              <a:t>Homework and weekly quiz: Week7_Polyphase_Homework_Quiz_Solutions.docx.</a:t>
-            </a:r>
-            <a:endParaRPr lang="en-US" sz="1600" dirty="0"/>
-          </a:p>
-        </p:txBody>
-      </p:sp>
-      <p:sp>
-        <p:nvSpPr>
-          <p:cNvPr id="25" name="Slide Number Placeholder 0"/>
-          <p:cNvSpPr>
-            <a:spLocks noGrp="1"/>
-          </p:cNvSpPr>
-          <p:nvPr>
-            <p:ph type="sldNum" sz="quarter" idx="4294967295"/>
-          </p:nvPr>
-        </p:nvSpPr>
-        <p:spPr>
-          <a:xfrm>
-            <a:off x="11750040" y="6519672"/>
-            <a:ext cx="201168" cy="164592"/>
-          </a:xfrm>
-          <a:prstGeom prst="rect">
-            <a:avLst/>
-          </a:prstGeom>
-          <a:extLst>
-            <a:ext uri="{C572A759-6A51-4108-AA02-DFA0A04FC94B}">
-              <ma14:wrappingTextBoxFlag xmlns:ma14="http://schemas.microsoft.com/office/mac/drawingml/2011/main" val="0"/>
-            </a:ext>
-          </a:extLst>
-        </p:spPr>
-        <p:txBody>
-          <a:bodyPr/>
-          <a:lstStyle>
-            <a:lvl1pPr>
-              <a:defRPr sz="800">
-                <a:solidFill>
-                  <a:srgbClr val="64748B"/>
-                </a:solidFill>
-                <a:latin typeface="Aptos"/>
-                <a:ea typeface="Aptos"/>
-                <a:cs typeface="Aptos"/>
-              </a:defRPr>
-            </a:lvl1pPr>
-          </a:lstStyle>
-          <a:p>
-            <a:pPr algn="r"/>
-            <a:fld id="{F7021451-1387-4CA6-816F-3879F97B5CBC}" type="slidenum">
-              <a:rPr b="0" lang="en-US"/>
+              <a:rPr lang="en-US" b="0"/>
               <a:t>19</a:t>
             </a:fld>
             <a:endParaRPr lang="en-US"/>
@@ -8847,7 +9140,7 @@
           </a:bodyPr>
           <a:lstStyle/>
           <a:p>
-            <a:pPr indent="0" marL="0">
+            <a:pPr marL="0" indent="0">
               <a:buNone/>
             </a:pPr>
             <a:r>
@@ -8888,7 +9181,7 @@
           </a:bodyPr>
           <a:lstStyle/>
           <a:p>
-            <a:pPr indent="0" marL="0">
+            <a:pPr marL="0" indent="0">
               <a:buNone/>
             </a:pPr>
             <a:r>
@@ -9026,6 +9319,13 @@
             <a:prstDash val="solid"/>
           </a:ln>
         </p:spPr>
+        <p:txBody>
+          <a:bodyPr/>
+          <a:lstStyle/>
+          <a:p>
+            <a:endParaRPr lang="en-US"/>
+          </a:p>
+        </p:txBody>
       </p:sp>
       <p:sp>
         <p:nvSpPr>
@@ -9051,6 +9351,13 @@
             <a:prstDash val="solid"/>
           </a:ln>
         </p:spPr>
+        <p:txBody>
+          <a:bodyPr/>
+          <a:lstStyle/>
+          <a:p>
+            <a:endParaRPr lang="en-US"/>
+          </a:p>
+        </p:txBody>
       </p:sp>
       <p:sp>
         <p:nvSpPr>
@@ -9075,7 +9382,7 @@
           </a:bodyPr>
           <a:lstStyle/>
           <a:p>
-            <a:pPr indent="0" marL="0">
+            <a:pPr marL="0" indent="0">
               <a:buNone/>
             </a:pPr>
             <a:r>
@@ -9116,7 +9423,7 @@
           </a:bodyPr>
           <a:lstStyle/>
           <a:p>
-            <a:pPr indent="0" marL="0">
+            <a:pPr marL="0" indent="0">
               <a:buNone/>
             </a:pPr>
             <a:r>
@@ -9158,6 +9465,13 @@
             <a:prstDash val="solid"/>
           </a:ln>
         </p:spPr>
+        <p:txBody>
+          <a:bodyPr/>
+          <a:lstStyle/>
+          <a:p>
+            <a:endParaRPr lang="en-US"/>
+          </a:p>
+        </p:txBody>
       </p:sp>
       <p:sp>
         <p:nvSpPr>
@@ -9183,6 +9497,13 @@
             <a:prstDash val="solid"/>
           </a:ln>
         </p:spPr>
+        <p:txBody>
+          <a:bodyPr/>
+          <a:lstStyle/>
+          <a:p>
+            <a:endParaRPr lang="en-US"/>
+          </a:p>
+        </p:txBody>
       </p:sp>
       <p:sp>
         <p:nvSpPr>
@@ -9207,7 +9528,7 @@
           </a:bodyPr>
           <a:lstStyle/>
           <a:p>
-            <a:pPr indent="0" marL="0">
+            <a:pPr marL="0" indent="0">
               <a:buNone/>
             </a:pPr>
             <a:r>
@@ -9248,7 +9569,7 @@
           </a:bodyPr>
           <a:lstStyle/>
           <a:p>
-            <a:pPr indent="0" marL="0">
+            <a:pPr marL="0" indent="0">
               <a:buNone/>
             </a:pPr>
             <a:r>
@@ -9290,6 +9611,13 @@
             <a:prstDash val="solid"/>
           </a:ln>
         </p:spPr>
+        <p:txBody>
+          <a:bodyPr/>
+          <a:lstStyle/>
+          <a:p>
+            <a:endParaRPr lang="en-US"/>
+          </a:p>
+        </p:txBody>
       </p:sp>
       <p:sp>
         <p:nvSpPr>
@@ -9315,6 +9643,13 @@
             <a:prstDash val="solid"/>
           </a:ln>
         </p:spPr>
+        <p:txBody>
+          <a:bodyPr/>
+          <a:lstStyle/>
+          <a:p>
+            <a:endParaRPr lang="en-US"/>
+          </a:p>
+        </p:txBody>
       </p:sp>
       <p:sp>
         <p:nvSpPr>
@@ -9339,7 +9674,7 @@
           </a:bodyPr>
           <a:lstStyle/>
           <a:p>
-            <a:pPr indent="0" marL="0">
+            <a:pPr marL="0" indent="0">
               <a:buNone/>
             </a:pPr>
             <a:r>
@@ -9380,7 +9715,7 @@
           </a:bodyPr>
           <a:lstStyle/>
           <a:p>
-            <a:pPr indent="0" marL="0">
+            <a:pPr marL="0" indent="0">
               <a:buNone/>
             </a:pPr>
             <a:r>
@@ -9418,7 +9753,7 @@
           </a:prstGeom>
           <a:extLst>
             <a:ext uri="{C572A759-6A51-4108-AA02-DFA0A04FC94B}">
-              <ma14:wrappingTextBoxFlag xmlns:ma14="http://schemas.microsoft.com/office/mac/drawingml/2011/main" val="0"/>
+              <ma14:wrappingTextBoxFlag xmlns:ma14="http://schemas.microsoft.com/office/mac/drawingml/2011/main" xmlns="" val="0"/>
             </a:ext>
           </a:extLst>
         </p:spPr>
@@ -9439,8 +9774,259 @@
           <a:p>
             <a:pPr algn="r"/>
             <a:fld id="{F7021451-1387-4CA6-816F-3879F97B5CBC}" type="slidenum">
-              <a:rPr b="0" lang="en-US"/>
+              <a:rPr lang="en-US" b="0"/>
               <a:t>2</a:t>
+            </a:fld>
+            <a:endParaRPr lang="en-US"/>
+          </a:p>
+        </p:txBody>
+      </p:sp>
+    </p:spTree>
+  </p:cSld>
+  <p:clrMapOvr>
+    <a:masterClrMapping/>
+  </p:clrMapOvr>
+</p:sld>
+</file>
+
+<file path=ppt/slides/slide20.xml><?xml version="1.0" encoding="utf-8"?>
+<p:sld xmlns:a="http://schemas.openxmlformats.org/drawingml/2006/main" xmlns:r="http://schemas.openxmlformats.org/officeDocument/2006/relationships" xmlns:p="http://schemas.openxmlformats.org/presentationml/2006/main">
+  <p:cSld name="Slide 19">
+    <p:spTree>
+      <p:nvGrpSpPr>
+        <p:cNvPr id="1" name=""/>
+        <p:cNvGrpSpPr/>
+        <p:nvPr/>
+      </p:nvGrpSpPr>
+      <p:grpSpPr>
+        <a:xfrm>
+          <a:off x="0" y="0"/>
+          <a:ext cx="0" cy="0"/>
+          <a:chOff x="0" y="0"/>
+          <a:chExt cx="0" cy="0"/>
+        </a:xfrm>
+      </p:grpSpPr>
+      <p:sp>
+        <p:nvSpPr>
+          <p:cNvPr id="2" name="Text 0"/>
+          <p:cNvSpPr/>
+          <p:nvPr/>
+        </p:nvSpPr>
+        <p:spPr>
+          <a:xfrm>
+            <a:off x="566928" y="310896"/>
+            <a:ext cx="11018520" cy="438912"/>
+          </a:xfrm>
+          <a:prstGeom prst="rect">
+            <a:avLst/>
+          </a:prstGeom>
+          <a:noFill/>
+          <a:ln/>
+        </p:spPr>
+        <p:txBody>
+          <a:bodyPr wrap="square" lIns="0" tIns="0" rIns="0" bIns="0" rtlCol="0" anchor="ctr">
+            <a:normAutofit/>
+          </a:bodyPr>
+          <a:lstStyle/>
+          <a:p>
+            <a:pPr marL="0" indent="0">
+              <a:buNone/>
+            </a:pPr>
+            <a:r>
+              <a:rPr lang="en-US" sz="2500" b="1" dirty="0">
+                <a:solidFill>
+                  <a:srgbClr val="17324D"/>
+                </a:solidFill>
+                <a:latin typeface="Aptos" pitchFamily="34" charset="0"/>
+                <a:ea typeface="Aptos" pitchFamily="34" charset="-122"/>
+                <a:cs typeface="Aptos" pitchFamily="34" charset="-120"/>
+              </a:rPr>
+              <a:t>References and instructor resources</a:t>
+            </a:r>
+            <a:endParaRPr lang="en-US" sz="2500" dirty="0"/>
+          </a:p>
+        </p:txBody>
+      </p:sp>
+      <p:sp>
+        <p:nvSpPr>
+          <p:cNvPr id="3" name="Text 1"/>
+          <p:cNvSpPr/>
+          <p:nvPr/>
+        </p:nvSpPr>
+        <p:spPr>
+          <a:xfrm>
+            <a:off x="585216" y="795528"/>
+            <a:ext cx="10744200" cy="292608"/>
+          </a:xfrm>
+          <a:prstGeom prst="rect">
+            <a:avLst/>
+          </a:prstGeom>
+          <a:noFill/>
+          <a:ln/>
+        </p:spPr>
+        <p:txBody>
+          <a:bodyPr wrap="square" lIns="0" tIns="0" rIns="0" bIns="0" rtlCol="0" anchor="ctr">
+            <a:normAutofit/>
+          </a:bodyPr>
+          <a:lstStyle/>
+          <a:p>
+            <a:pPr marL="0" indent="0">
+              <a:buNone/>
+            </a:pPr>
+            <a:r>
+              <a:rPr lang="en-US" sz="1150" dirty="0">
+                <a:solidFill>
+                  <a:srgbClr val="64748B"/>
+                </a:solidFill>
+                <a:latin typeface="Aptos" pitchFamily="34" charset="0"/>
+                <a:ea typeface="Aptos" pitchFamily="34" charset="-122"/>
+                <a:cs typeface="Aptos" pitchFamily="34" charset="-120"/>
+              </a:rPr>
+              <a:t>Week 7 • Lecture 14</a:t>
+            </a:r>
+            <a:endParaRPr lang="en-US" sz="1150" dirty="0"/>
+          </a:p>
+        </p:txBody>
+      </p:sp>
+      <p:sp>
+        <p:nvSpPr>
+          <p:cNvPr id="4" name="Text 2"/>
+          <p:cNvSpPr/>
+          <p:nvPr/>
+        </p:nvSpPr>
+        <p:spPr>
+          <a:xfrm>
+            <a:off x="914400" y="1417320"/>
+            <a:ext cx="9875520" cy="3017520"/>
+          </a:xfrm>
+          <a:prstGeom prst="rect">
+            <a:avLst/>
+          </a:prstGeom>
+          <a:noFill/>
+          <a:ln/>
+        </p:spPr>
+        <p:txBody>
+          <a:bodyPr wrap="square" lIns="635" tIns="635" rIns="635" bIns="635" rtlCol="0" anchor="ctr">
+            <a:normAutofit/>
+          </a:bodyPr>
+          <a:lstStyle/>
+          <a:p>
+            <a:pPr marL="228600" indent="-228600">
+              <a:buSzPct val="100000"/>
+              <a:buChar char="•"/>
+            </a:pPr>
+            <a:r>
+              <a:rPr lang="en-US" sz="1600" dirty="0">
+                <a:solidFill>
+                  <a:srgbClr val="1F2937"/>
+                </a:solidFill>
+                <a:latin typeface="Aptos" pitchFamily="34" charset="0"/>
+                <a:ea typeface="Aptos" pitchFamily="34" charset="-122"/>
+                <a:cs typeface="Aptos" pitchFamily="34" charset="-120"/>
+              </a:rPr>
+              <a:t>Oppenheim &amp; Schafer, Discrete-Time Signal Processing, §4.7–4.8: polyphase structures and filter banks.</a:t>
+            </a:r>
+            <a:endParaRPr lang="en-US" sz="1600" dirty="0"/>
+          </a:p>
+          <a:p>
+            <a:pPr marL="228600" indent="-228600">
+              <a:buSzPct val="100000"/>
+              <a:buChar char="•"/>
+            </a:pPr>
+            <a:r>
+              <a:rPr lang="en-US" sz="1600" dirty="0">
+                <a:solidFill>
+                  <a:srgbClr val="1F2937"/>
+                </a:solidFill>
+                <a:latin typeface="Aptos" pitchFamily="34" charset="0"/>
+                <a:ea typeface="Aptos" pitchFamily="34" charset="-122"/>
+                <a:cs typeface="Aptos" pitchFamily="34" charset="-120"/>
+              </a:rPr>
+              <a:t>Raschka et al., Machine Learning with PyTorch and Scikit-Learn: CNN architectures and feature-learning workflow.</a:t>
+            </a:r>
+            <a:endParaRPr lang="en-US" sz="1600" dirty="0"/>
+          </a:p>
+          <a:p>
+            <a:pPr marL="228600" indent="-228600">
+              <a:buSzPct val="100000"/>
+              <a:buChar char="•"/>
+            </a:pPr>
+            <a:r>
+              <a:rPr lang="en-US" sz="1600" dirty="0">
+                <a:solidFill>
+                  <a:srgbClr val="1F2937"/>
+                </a:solidFill>
+                <a:latin typeface="Aptos" pitchFamily="34" charset="0"/>
+                <a:ea typeface="Aptos" pitchFamily="34" charset="-122"/>
+                <a:cs typeface="Aptos" pitchFamily="34" charset="-120"/>
+              </a:rPr>
+              <a:t>Accompanying notebook: Week7_Polyphase_DSP_ML_Demos.ipynb.</a:t>
+            </a:r>
+            <a:endParaRPr lang="en-US" sz="1600" dirty="0"/>
+          </a:p>
+          <a:p>
+            <a:pPr marL="228600" indent="-228600">
+              <a:buSzPct val="100000"/>
+              <a:buChar char="•"/>
+            </a:pPr>
+            <a:r>
+              <a:rPr lang="en-US" sz="1600" dirty="0">
+                <a:solidFill>
+                  <a:srgbClr val="1F2937"/>
+                </a:solidFill>
+                <a:latin typeface="Aptos" pitchFamily="34" charset="0"/>
+                <a:ea typeface="Aptos" pitchFamily="34" charset="-122"/>
+                <a:cs typeface="Aptos" pitchFamily="34" charset="-120"/>
+              </a:rPr>
+              <a:t>Homework and weekly quiz: Week7_Polyphase_Homework_Quiz_Solutions.docx.</a:t>
+            </a:r>
+            <a:endParaRPr lang="en-US" sz="1600" dirty="0"/>
+          </a:p>
+        </p:txBody>
+      </p:sp>
+      <p:sp>
+        <p:nvSpPr>
+          <p:cNvPr id="25" name="Slide Number Placeholder 0"/>
+          <p:cNvSpPr>
+            <a:spLocks noGrp="1"/>
+          </p:cNvSpPr>
+          <p:nvPr>
+            <p:ph type="sldNum" sz="quarter" idx="4294967295"/>
+          </p:nvPr>
+        </p:nvSpPr>
+        <p:spPr>
+          <a:xfrm>
+            <a:off x="11750040" y="6519672"/>
+            <a:ext cx="201168" cy="164592"/>
+          </a:xfrm>
+          <a:prstGeom prst="rect">
+            <a:avLst/>
+          </a:prstGeom>
+          <a:extLst>
+            <a:ext uri="{C572A759-6A51-4108-AA02-DFA0A04FC94B}">
+              <ma14:wrappingTextBoxFlag xmlns:ma14="http://schemas.microsoft.com/office/mac/drawingml/2011/main" xmlns="" val="0"/>
+            </a:ext>
+          </a:extLst>
+        </p:spPr>
+        <p:txBody>
+          <a:bodyPr/>
+          <a:lstStyle>
+            <a:lvl1pPr>
+              <a:defRPr sz="800">
+                <a:solidFill>
+                  <a:srgbClr val="64748B"/>
+                </a:solidFill>
+                <a:latin typeface="Aptos"/>
+                <a:ea typeface="Aptos"/>
+                <a:cs typeface="Aptos"/>
+              </a:defRPr>
+            </a:lvl1pPr>
+          </a:lstStyle>
+          <a:p>
+            <a:pPr algn="r"/>
+            <a:fld id="{F7021451-1387-4CA6-816F-3879F97B5CBC}" type="slidenum">
+              <a:rPr lang="en-US" b="0"/>
+              <a:t>20</a:t>
             </a:fld>
             <a:endParaRPr lang="en-US"/>
           </a:p>
@@ -9462,6 +10048,7 @@
         <a:solidFill>
           <a:srgbClr val="17324D"/>
         </a:solidFill>
+        <a:effectLst/>
       </p:bgPr>
     </p:bg>
     <p:spTree>
@@ -9499,7 +10086,7 @@
           <a:bodyPr wrap="square" lIns="0" tIns="0" rIns="0" bIns="0" rtlCol="0" anchor="ctr"/>
           <a:lstStyle/>
           <a:p>
-            <a:pPr indent="0" marL="0">
+            <a:pPr marL="0" indent="0">
               <a:buNone/>
             </a:pPr>
             <a:r>
@@ -9540,7 +10127,7 @@
           </a:bodyPr>
           <a:lstStyle/>
           <a:p>
-            <a:pPr indent="0" marL="0">
+            <a:pPr marL="0" indent="0">
               <a:buNone/>
             </a:pPr>
             <a:r>
@@ -9579,7 +10166,7 @@
           <a:bodyPr wrap="square" lIns="0" tIns="0" rIns="0" bIns="0" rtlCol="0" anchor="ctr"/>
           <a:lstStyle/>
           <a:p>
-            <a:pPr indent="0" marL="0">
+            <a:pPr marL="0" indent="0">
               <a:buNone/>
             </a:pPr>
             <a:r>
@@ -9617,7 +10204,7 @@
           </a:prstGeom>
           <a:extLst>
             <a:ext uri="{C572A759-6A51-4108-AA02-DFA0A04FC94B}">
-              <ma14:wrappingTextBoxFlag xmlns:ma14="http://schemas.microsoft.com/office/mac/drawingml/2011/main" val="0"/>
+              <ma14:wrappingTextBoxFlag xmlns:ma14="http://schemas.microsoft.com/office/mac/drawingml/2011/main" xmlns="" val="0"/>
             </a:ext>
           </a:extLst>
         </p:spPr>
@@ -9638,7 +10225,7 @@
           <a:p>
             <a:pPr algn="r"/>
             <a:fld id="{F7021451-1387-4CA6-816F-3879F97B5CBC}" type="slidenum">
-              <a:rPr b="0" lang="en-US"/>
+              <a:rPr lang="en-US" b="0"/>
               <a:t>3</a:t>
             </a:fld>
             <a:endParaRPr lang="en-US"/>
@@ -9693,7 +10280,7 @@
           </a:bodyPr>
           <a:lstStyle/>
           <a:p>
-            <a:pPr indent="0" marL="0">
+            <a:pPr marL="0" indent="0">
               <a:buNone/>
             </a:pPr>
             <a:r>
@@ -9734,7 +10321,7 @@
           </a:bodyPr>
           <a:lstStyle/>
           <a:p>
-            <a:pPr indent="0" marL="0">
+            <a:pPr marL="0" indent="0">
               <a:buNone/>
             </a:pPr>
             <a:r>
@@ -9776,6 +10363,13 @@
             <a:prstDash val="solid"/>
           </a:ln>
         </p:spPr>
+        <p:txBody>
+          <a:bodyPr/>
+          <a:lstStyle/>
+          <a:p>
+            <a:endParaRPr lang="en-US"/>
+          </a:p>
+        </p:txBody>
       </p:sp>
       <p:sp>
         <p:nvSpPr>
@@ -9800,7 +10394,7 @@
           </a:bodyPr>
           <a:lstStyle/>
           <a:p>
-            <a:pPr algn="ctr" indent="0" marL="0">
+            <a:pPr marL="0" indent="0" algn="ctr">
               <a:buNone/>
             </a:pPr>
             <a:r>
@@ -9842,6 +10436,13 @@
             <a:tailEnd type="triangle"/>
           </a:ln>
         </p:spPr>
+        <p:txBody>
+          <a:bodyPr/>
+          <a:lstStyle/>
+          <a:p>
+            <a:endParaRPr lang="en-US"/>
+          </a:p>
+        </p:txBody>
       </p:sp>
       <p:sp>
         <p:nvSpPr>
@@ -9867,6 +10468,13 @@
             <a:prstDash val="solid"/>
           </a:ln>
         </p:spPr>
+        <p:txBody>
+          <a:bodyPr/>
+          <a:lstStyle/>
+          <a:p>
+            <a:endParaRPr lang="en-US"/>
+          </a:p>
+        </p:txBody>
       </p:sp>
       <p:sp>
         <p:nvSpPr>
@@ -9891,7 +10499,7 @@
           </a:bodyPr>
           <a:lstStyle/>
           <a:p>
-            <a:pPr algn="ctr" indent="0" marL="0">
+            <a:pPr marL="0" indent="0" algn="ctr">
               <a:buNone/>
             </a:pPr>
             <a:r>
@@ -9933,6 +10541,13 @@
             <a:tailEnd type="triangle"/>
           </a:ln>
         </p:spPr>
+        <p:txBody>
+          <a:bodyPr/>
+          <a:lstStyle/>
+          <a:p>
+            <a:endParaRPr lang="en-US"/>
+          </a:p>
+        </p:txBody>
       </p:sp>
       <p:sp>
         <p:nvSpPr>
@@ -9958,6 +10573,13 @@
             <a:prstDash val="solid"/>
           </a:ln>
         </p:spPr>
+        <p:txBody>
+          <a:bodyPr/>
+          <a:lstStyle/>
+          <a:p>
+            <a:endParaRPr lang="en-US"/>
+          </a:p>
+        </p:txBody>
       </p:sp>
       <p:sp>
         <p:nvSpPr>
@@ -9982,7 +10604,7 @@
           </a:bodyPr>
           <a:lstStyle/>
           <a:p>
-            <a:pPr algn="ctr" indent="0" marL="0">
+            <a:pPr marL="0" indent="0" algn="ctr">
               <a:buNone/>
             </a:pPr>
             <a:r>
@@ -10024,6 +10646,13 @@
             <a:tailEnd type="triangle"/>
           </a:ln>
         </p:spPr>
+        <p:txBody>
+          <a:bodyPr/>
+          <a:lstStyle/>
+          <a:p>
+            <a:endParaRPr lang="en-US"/>
+          </a:p>
+        </p:txBody>
       </p:sp>
       <p:sp>
         <p:nvSpPr>
@@ -10049,6 +10678,13 @@
             <a:prstDash val="solid"/>
           </a:ln>
         </p:spPr>
+        <p:txBody>
+          <a:bodyPr/>
+          <a:lstStyle/>
+          <a:p>
+            <a:endParaRPr lang="en-US"/>
+          </a:p>
+        </p:txBody>
       </p:sp>
       <p:sp>
         <p:nvSpPr>
@@ -10073,7 +10709,7 @@
           </a:bodyPr>
           <a:lstStyle/>
           <a:p>
-            <a:pPr algn="ctr" indent="0" marL="0">
+            <a:pPr marL="0" indent="0" algn="ctr">
               <a:buNone/>
             </a:pPr>
             <a:r>
@@ -10093,14 +10729,14 @@
       </p:sp>
       <p:pic>
         <p:nvPicPr>
-          <p:cNvPr id="15" name="Image 0" descr="/mnt/data/week7_polyphase/assets/interpolation_savings.png">    </p:cNvPr>
+          <p:cNvPr id="15" name="Image 0" descr="/mnt/data/week7_polyphase/assets/interpolation_savings.png"/>
           <p:cNvPicPr>
             <a:picLocks noChangeAspect="1"/>
           </p:cNvPicPr>
           <p:nvPr/>
         </p:nvPicPr>
         <p:blipFill>
-          <a:blip r:embed="rId1"/>
+          <a:blip r:embed="rId3"/>
           <a:stretch>
             <a:fillRect/>
           </a:stretch>
@@ -10139,6 +10775,13 @@
             <a:prstDash val="solid"/>
           </a:ln>
         </p:spPr>
+        <p:txBody>
+          <a:bodyPr/>
+          <a:lstStyle/>
+          <a:p>
+            <a:endParaRPr lang="en-US"/>
+          </a:p>
+        </p:txBody>
       </p:sp>
       <p:sp>
         <p:nvSpPr>
@@ -10164,6 +10807,13 @@
             <a:prstDash val="solid"/>
           </a:ln>
         </p:spPr>
+        <p:txBody>
+          <a:bodyPr/>
+          <a:lstStyle/>
+          <a:p>
+            <a:endParaRPr lang="en-US"/>
+          </a:p>
+        </p:txBody>
       </p:sp>
       <p:sp>
         <p:nvSpPr>
@@ -10188,7 +10838,7 @@
           </a:bodyPr>
           <a:lstStyle/>
           <a:p>
-            <a:pPr indent="0" marL="0">
+            <a:pPr marL="0" indent="0">
               <a:buNone/>
             </a:pPr>
             <a:r>
@@ -10229,7 +10879,7 @@
           </a:bodyPr>
           <a:lstStyle/>
           <a:p>
-            <a:pPr indent="0" marL="0">
+            <a:pPr marL="0" indent="0">
               <a:buNone/>
             </a:pPr>
             <a:r>
@@ -10271,6 +10921,13 @@
             <a:prstDash val="solid"/>
           </a:ln>
         </p:spPr>
+        <p:txBody>
+          <a:bodyPr/>
+          <a:lstStyle/>
+          <a:p>
+            <a:endParaRPr lang="en-US"/>
+          </a:p>
+        </p:txBody>
       </p:sp>
       <p:sp>
         <p:nvSpPr>
@@ -10296,6 +10953,13 @@
             <a:prstDash val="solid"/>
           </a:ln>
         </p:spPr>
+        <p:txBody>
+          <a:bodyPr/>
+          <a:lstStyle/>
+          <a:p>
+            <a:endParaRPr lang="en-US"/>
+          </a:p>
+        </p:txBody>
       </p:sp>
       <p:sp>
         <p:nvSpPr>
@@ -10320,7 +10984,7 @@
           </a:bodyPr>
           <a:lstStyle/>
           <a:p>
-            <a:pPr indent="0" marL="0">
+            <a:pPr marL="0" indent="0">
               <a:buNone/>
             </a:pPr>
             <a:r>
@@ -10361,7 +11025,7 @@
           </a:bodyPr>
           <a:lstStyle/>
           <a:p>
-            <a:pPr indent="0" marL="0">
+            <a:pPr marL="0" indent="0">
               <a:buNone/>
             </a:pPr>
             <a:r>
@@ -10403,6 +11067,13 @@
             <a:prstDash val="solid"/>
           </a:ln>
         </p:spPr>
+        <p:txBody>
+          <a:bodyPr/>
+          <a:lstStyle/>
+          <a:p>
+            <a:endParaRPr lang="en-US"/>
+          </a:p>
+        </p:txBody>
       </p:sp>
       <p:sp>
         <p:nvSpPr>
@@ -10427,7 +11098,7 @@
           </a:bodyPr>
           <a:lstStyle/>
           <a:p>
-            <a:pPr algn="ctr" indent="0" marL="0">
+            <a:pPr marL="0" indent="0" algn="ctr">
               <a:buNone/>
             </a:pPr>
             <a:r>
@@ -10447,7 +11118,7 @@
       </p:sp>
       <p:sp>
         <p:nvSpPr>
-          <p:cNvPr id="25" name="Slide Number Placeholder 0"/>
+          <p:cNvPr id="26" name="Slide Number Placeholder 0"/>
           <p:cNvSpPr>
             <a:spLocks noGrp="1"/>
           </p:cNvSpPr>
@@ -10465,7 +11136,7 @@
           </a:prstGeom>
           <a:extLst>
             <a:ext uri="{C572A759-6A51-4108-AA02-DFA0A04FC94B}">
-              <ma14:wrappingTextBoxFlag xmlns:ma14="http://schemas.microsoft.com/office/mac/drawingml/2011/main" val="0"/>
+              <ma14:wrappingTextBoxFlag xmlns:ma14="http://schemas.microsoft.com/office/mac/drawingml/2011/main" xmlns="" val="0"/>
             </a:ext>
           </a:extLst>
         </p:spPr>
@@ -10486,7 +11157,7 @@
           <a:p>
             <a:pPr algn="r"/>
             <a:fld id="{F7021451-1387-4CA6-816F-3879F97B5CBC}" type="slidenum">
-              <a:rPr b="0" lang="en-US"/>
+              <a:rPr lang="en-US" b="0"/>
               <a:t>4</a:t>
             </a:fld>
             <a:endParaRPr lang="en-US"/>
@@ -10541,7 +11212,7 @@
           </a:bodyPr>
           <a:lstStyle/>
           <a:p>
-            <a:pPr indent="0" marL="0">
+            <a:pPr marL="0" indent="0">
               <a:buNone/>
             </a:pPr>
             <a:r>
@@ -10582,7 +11253,7 @@
           </a:bodyPr>
           <a:lstStyle/>
           <a:p>
-            <a:pPr indent="0" marL="0">
+            <a:pPr marL="0" indent="0">
               <a:buNone/>
             </a:pPr>
             <a:r>
@@ -10624,6 +11295,13 @@
             <a:prstDash val="solid"/>
           </a:ln>
         </p:spPr>
+        <p:txBody>
+          <a:bodyPr/>
+          <a:lstStyle/>
+          <a:p>
+            <a:endParaRPr lang="en-US"/>
+          </a:p>
+        </p:txBody>
       </p:sp>
       <p:sp>
         <p:nvSpPr>
@@ -10648,7 +11326,7 @@
           </a:bodyPr>
           <a:lstStyle/>
           <a:p>
-            <a:pPr algn="ctr" indent="0" marL="0">
+            <a:pPr marL="0" indent="0" algn="ctr">
               <a:buNone/>
             </a:pPr>
             <a:r>
@@ -10690,6 +11368,13 @@
             <a:tailEnd type="triangle"/>
           </a:ln>
         </p:spPr>
+        <p:txBody>
+          <a:bodyPr/>
+          <a:lstStyle/>
+          <a:p>
+            <a:endParaRPr lang="en-US"/>
+          </a:p>
+        </p:txBody>
       </p:sp>
       <p:sp>
         <p:nvSpPr>
@@ -10715,6 +11400,13 @@
             <a:prstDash val="solid"/>
           </a:ln>
         </p:spPr>
+        <p:txBody>
+          <a:bodyPr/>
+          <a:lstStyle/>
+          <a:p>
+            <a:endParaRPr lang="en-US"/>
+          </a:p>
+        </p:txBody>
       </p:sp>
       <p:sp>
         <p:nvSpPr>
@@ -10739,7 +11431,7 @@
           </a:bodyPr>
           <a:lstStyle/>
           <a:p>
-            <a:pPr algn="ctr" indent="0" marL="0">
+            <a:pPr marL="0" indent="0" algn="ctr">
               <a:buNone/>
             </a:pPr>
             <a:r>
@@ -10781,6 +11473,13 @@
             <a:tailEnd type="triangle"/>
           </a:ln>
         </p:spPr>
+        <p:txBody>
+          <a:bodyPr/>
+          <a:lstStyle/>
+          <a:p>
+            <a:endParaRPr lang="en-US"/>
+          </a:p>
+        </p:txBody>
       </p:sp>
       <p:sp>
         <p:nvSpPr>
@@ -10806,6 +11505,13 @@
             <a:prstDash val="solid"/>
           </a:ln>
         </p:spPr>
+        <p:txBody>
+          <a:bodyPr/>
+          <a:lstStyle/>
+          <a:p>
+            <a:endParaRPr lang="en-US"/>
+          </a:p>
+        </p:txBody>
       </p:sp>
       <p:sp>
         <p:nvSpPr>
@@ -10830,7 +11536,7 @@
           </a:bodyPr>
           <a:lstStyle/>
           <a:p>
-            <a:pPr algn="ctr" indent="0" marL="0">
+            <a:pPr marL="0" indent="0" algn="ctr">
               <a:buNone/>
             </a:pPr>
             <a:r>
@@ -10872,6 +11578,13 @@
             <a:tailEnd type="triangle"/>
           </a:ln>
         </p:spPr>
+        <p:txBody>
+          <a:bodyPr/>
+          <a:lstStyle/>
+          <a:p>
+            <a:endParaRPr lang="en-US"/>
+          </a:p>
+        </p:txBody>
       </p:sp>
       <p:sp>
         <p:nvSpPr>
@@ -10897,6 +11610,13 @@
             <a:prstDash val="solid"/>
           </a:ln>
         </p:spPr>
+        <p:txBody>
+          <a:bodyPr/>
+          <a:lstStyle/>
+          <a:p>
+            <a:endParaRPr lang="en-US"/>
+          </a:p>
+        </p:txBody>
       </p:sp>
       <p:sp>
         <p:nvSpPr>
@@ -10921,7 +11641,7 @@
           </a:bodyPr>
           <a:lstStyle/>
           <a:p>
-            <a:pPr algn="ctr" indent="0" marL="0">
+            <a:pPr marL="0" indent="0" algn="ctr">
               <a:buNone/>
             </a:pPr>
             <a:r>
@@ -10960,7 +11680,7 @@
           <a:bodyPr wrap="square" lIns="0" tIns="0" rIns="0" bIns="0" rtlCol="0" anchor="ctr"/>
           <a:lstStyle/>
           <a:p>
-            <a:pPr algn="ctr" indent="0" marL="0">
+            <a:pPr marL="0" indent="0" algn="ctr">
               <a:buNone/>
             </a:pPr>
             <a:r>
@@ -11002,6 +11722,13 @@
             <a:prstDash val="solid"/>
           </a:ln>
         </p:spPr>
+        <p:txBody>
+          <a:bodyPr/>
+          <a:lstStyle/>
+          <a:p>
+            <a:endParaRPr lang="en-US"/>
+          </a:p>
+        </p:txBody>
       </p:sp>
       <p:sp>
         <p:nvSpPr>
@@ -11026,7 +11753,7 @@
           </a:bodyPr>
           <a:lstStyle/>
           <a:p>
-            <a:pPr algn="ctr" indent="0" marL="0">
+            <a:pPr marL="0" indent="0" algn="ctr">
               <a:buNone/>
             </a:pPr>
             <a:r>
@@ -11068,6 +11795,13 @@
             <a:tailEnd type="triangle"/>
           </a:ln>
         </p:spPr>
+        <p:txBody>
+          <a:bodyPr/>
+          <a:lstStyle/>
+          <a:p>
+            <a:endParaRPr lang="en-US"/>
+          </a:p>
+        </p:txBody>
       </p:sp>
       <p:sp>
         <p:nvSpPr>
@@ -11093,6 +11827,13 @@
             <a:prstDash val="solid"/>
           </a:ln>
         </p:spPr>
+        <p:txBody>
+          <a:bodyPr/>
+          <a:lstStyle/>
+          <a:p>
+            <a:endParaRPr lang="en-US"/>
+          </a:p>
+        </p:txBody>
       </p:sp>
       <p:sp>
         <p:nvSpPr>
@@ -11117,7 +11858,7 @@
           </a:bodyPr>
           <a:lstStyle/>
           <a:p>
-            <a:pPr algn="ctr" indent="0" marL="0">
+            <a:pPr marL="0" indent="0" algn="ctr">
               <a:buNone/>
             </a:pPr>
             <a:r>
@@ -11159,6 +11900,13 @@
             <a:tailEnd type="triangle"/>
           </a:ln>
         </p:spPr>
+        <p:txBody>
+          <a:bodyPr/>
+          <a:lstStyle/>
+          <a:p>
+            <a:endParaRPr lang="en-US"/>
+          </a:p>
+        </p:txBody>
       </p:sp>
       <p:sp>
         <p:nvSpPr>
@@ -11184,6 +11932,13 @@
             <a:prstDash val="solid"/>
           </a:ln>
         </p:spPr>
+        <p:txBody>
+          <a:bodyPr/>
+          <a:lstStyle/>
+          <a:p>
+            <a:endParaRPr lang="en-US"/>
+          </a:p>
+        </p:txBody>
       </p:sp>
       <p:sp>
         <p:nvSpPr>
@@ -11208,7 +11963,7 @@
           </a:bodyPr>
           <a:lstStyle/>
           <a:p>
-            <a:pPr algn="ctr" indent="0" marL="0">
+            <a:pPr marL="0" indent="0" algn="ctr">
               <a:buNone/>
             </a:pPr>
             <a:r>
@@ -11250,6 +12005,13 @@
             <a:tailEnd type="triangle"/>
           </a:ln>
         </p:spPr>
+        <p:txBody>
+          <a:bodyPr/>
+          <a:lstStyle/>
+          <a:p>
+            <a:endParaRPr lang="en-US"/>
+          </a:p>
+        </p:txBody>
       </p:sp>
       <p:sp>
         <p:nvSpPr>
@@ -11275,6 +12037,13 @@
             <a:prstDash val="solid"/>
           </a:ln>
         </p:spPr>
+        <p:txBody>
+          <a:bodyPr/>
+          <a:lstStyle/>
+          <a:p>
+            <a:endParaRPr lang="en-US"/>
+          </a:p>
+        </p:txBody>
       </p:sp>
       <p:sp>
         <p:nvSpPr>
@@ -11299,7 +12068,7 @@
           </a:bodyPr>
           <a:lstStyle/>
           <a:p>
-            <a:pPr algn="ctr" indent="0" marL="0">
+            <a:pPr marL="0" indent="0" algn="ctr">
               <a:buNone/>
             </a:pPr>
             <a:r>
@@ -11341,6 +12110,13 @@
             <a:prstDash val="solid"/>
           </a:ln>
         </p:spPr>
+        <p:txBody>
+          <a:bodyPr/>
+          <a:lstStyle/>
+          <a:p>
+            <a:endParaRPr lang="en-US"/>
+          </a:p>
+        </p:txBody>
       </p:sp>
       <p:sp>
         <p:nvSpPr>
@@ -11365,7 +12141,7 @@
           </a:bodyPr>
           <a:lstStyle/>
           <a:p>
-            <a:pPr algn="ctr" indent="0" marL="0">
+            <a:pPr marL="0" indent="0" algn="ctr">
               <a:buNone/>
             </a:pPr>
             <a:r>
@@ -11407,6 +12183,13 @@
             <a:prstDash val="solid"/>
           </a:ln>
         </p:spPr>
+        <p:txBody>
+          <a:bodyPr/>
+          <a:lstStyle/>
+          <a:p>
+            <a:endParaRPr lang="en-US"/>
+          </a:p>
+        </p:txBody>
       </p:sp>
       <p:sp>
         <p:nvSpPr>
@@ -11432,6 +12215,13 @@
             <a:prstDash val="solid"/>
           </a:ln>
         </p:spPr>
+        <p:txBody>
+          <a:bodyPr/>
+          <a:lstStyle/>
+          <a:p>
+            <a:endParaRPr lang="en-US"/>
+          </a:p>
+        </p:txBody>
       </p:sp>
       <p:sp>
         <p:nvSpPr>
@@ -11456,7 +12246,7 @@
           </a:bodyPr>
           <a:lstStyle/>
           <a:p>
-            <a:pPr indent="0" marL="0">
+            <a:pPr marL="0" indent="0">
               <a:buNone/>
             </a:pPr>
             <a:r>
@@ -11497,7 +12287,7 @@
           </a:bodyPr>
           <a:lstStyle/>
           <a:p>
-            <a:pPr indent="0" marL="0">
+            <a:pPr marL="0" indent="0">
               <a:buNone/>
             </a:pPr>
             <a:r>
@@ -11539,6 +12329,13 @@
             <a:prstDash val="solid"/>
           </a:ln>
         </p:spPr>
+        <p:txBody>
+          <a:bodyPr/>
+          <a:lstStyle/>
+          <a:p>
+            <a:endParaRPr lang="en-US"/>
+          </a:p>
+        </p:txBody>
       </p:sp>
       <p:sp>
         <p:nvSpPr>
@@ -11564,6 +12361,13 @@
             <a:prstDash val="solid"/>
           </a:ln>
         </p:spPr>
+        <p:txBody>
+          <a:bodyPr/>
+          <a:lstStyle/>
+          <a:p>
+            <a:endParaRPr lang="en-US"/>
+          </a:p>
+        </p:txBody>
       </p:sp>
       <p:sp>
         <p:nvSpPr>
@@ -11588,7 +12392,7 @@
           </a:bodyPr>
           <a:lstStyle/>
           <a:p>
-            <a:pPr indent="0" marL="0">
+            <a:pPr marL="0" indent="0">
               <a:buNone/>
             </a:pPr>
             <a:r>
@@ -11629,7 +12433,7 @@
           </a:bodyPr>
           <a:lstStyle/>
           <a:p>
-            <a:pPr indent="0" marL="0">
+            <a:pPr marL="0" indent="0">
               <a:buNone/>
             </a:pPr>
             <a:r>
@@ -11649,7 +12453,7 @@
       </p:sp>
       <p:sp>
         <p:nvSpPr>
-          <p:cNvPr id="25" name="Slide Number Placeholder 0"/>
+          <p:cNvPr id="37" name="Slide Number Placeholder 0"/>
           <p:cNvSpPr>
             <a:spLocks noGrp="1"/>
           </p:cNvSpPr>
@@ -11667,7 +12471,7 @@
           </a:prstGeom>
           <a:extLst>
             <a:ext uri="{C572A759-6A51-4108-AA02-DFA0A04FC94B}">
-              <ma14:wrappingTextBoxFlag xmlns:ma14="http://schemas.microsoft.com/office/mac/drawingml/2011/main" val="0"/>
+              <ma14:wrappingTextBoxFlag xmlns:ma14="http://schemas.microsoft.com/office/mac/drawingml/2011/main" xmlns="" val="0"/>
             </a:ext>
           </a:extLst>
         </p:spPr>
@@ -11688,7 +12492,7 @@
           <a:p>
             <a:pPr algn="r"/>
             <a:fld id="{F7021451-1387-4CA6-816F-3879F97B5CBC}" type="slidenum">
-              <a:rPr b="0" lang="en-US"/>
+              <a:rPr lang="en-US" b="0"/>
               <a:t>5</a:t>
             </a:fld>
             <a:endParaRPr lang="en-US"/>
@@ -11743,7 +12547,7 @@
           </a:bodyPr>
           <a:lstStyle/>
           <a:p>
-            <a:pPr indent="0" marL="0">
+            <a:pPr marL="0" indent="0">
               <a:buNone/>
             </a:pPr>
             <a:r>
@@ -11784,7 +12588,7 @@
           </a:bodyPr>
           <a:lstStyle/>
           <a:p>
-            <a:pPr indent="0" marL="0">
+            <a:pPr marL="0" indent="0">
               <a:buNone/>
             </a:pPr>
             <a:r>
@@ -11826,6 +12630,13 @@
             <a:prstDash val="solid"/>
           </a:ln>
         </p:spPr>
+        <p:txBody>
+          <a:bodyPr/>
+          <a:lstStyle/>
+          <a:p>
+            <a:endParaRPr lang="en-US"/>
+          </a:p>
+        </p:txBody>
       </p:sp>
       <p:sp>
         <p:nvSpPr>
@@ -11850,7 +12661,7 @@
           </a:bodyPr>
           <a:lstStyle/>
           <a:p>
-            <a:pPr algn="ctr" indent="0" marL="0">
+            <a:pPr marL="0" indent="0" algn="ctr">
               <a:buNone/>
             </a:pPr>
             <a:r>
@@ -11889,7 +12700,7 @@
           <a:bodyPr wrap="square" lIns="0" tIns="0" rIns="0" bIns="0" rtlCol="0" anchor="ctr"/>
           <a:lstStyle/>
           <a:p>
-            <a:pPr algn="ctr" indent="0" marL="0">
+            <a:pPr marL="0" indent="0" algn="ctr">
               <a:buNone/>
             </a:pPr>
             <a:r>
@@ -11931,6 +12742,13 @@
             <a:prstDash val="solid"/>
           </a:ln>
         </p:spPr>
+        <p:txBody>
+          <a:bodyPr/>
+          <a:lstStyle/>
+          <a:p>
+            <a:endParaRPr lang="en-US"/>
+          </a:p>
+        </p:txBody>
       </p:sp>
       <p:sp>
         <p:nvSpPr>
@@ -11955,7 +12773,7 @@
           </a:bodyPr>
           <a:lstStyle/>
           <a:p>
-            <a:pPr algn="ctr" indent="0" marL="0">
+            <a:pPr marL="0" indent="0" algn="ctr">
               <a:buNone/>
             </a:pPr>
             <a:r>
@@ -11994,7 +12812,7 @@
           <a:bodyPr wrap="square" lIns="0" tIns="0" rIns="0" bIns="0" rtlCol="0" anchor="ctr"/>
           <a:lstStyle/>
           <a:p>
-            <a:pPr algn="ctr" indent="0" marL="0">
+            <a:pPr marL="0" indent="0" algn="ctr">
               <a:buNone/>
             </a:pPr>
             <a:r>
@@ -12036,6 +12854,13 @@
             <a:prstDash val="solid"/>
           </a:ln>
         </p:spPr>
+        <p:txBody>
+          <a:bodyPr/>
+          <a:lstStyle/>
+          <a:p>
+            <a:endParaRPr lang="en-US"/>
+          </a:p>
+        </p:txBody>
       </p:sp>
       <p:sp>
         <p:nvSpPr>
@@ -12060,7 +12885,7 @@
           </a:bodyPr>
           <a:lstStyle/>
           <a:p>
-            <a:pPr algn="ctr" indent="0" marL="0">
+            <a:pPr marL="0" indent="0" algn="ctr">
               <a:buNone/>
             </a:pPr>
             <a:r>
@@ -12099,7 +12924,7 @@
           <a:bodyPr wrap="square" lIns="0" tIns="0" rIns="0" bIns="0" rtlCol="0" anchor="ctr"/>
           <a:lstStyle/>
           <a:p>
-            <a:pPr algn="ctr" indent="0" marL="0">
+            <a:pPr marL="0" indent="0" algn="ctr">
               <a:buNone/>
             </a:pPr>
             <a:r>
@@ -12141,6 +12966,13 @@
             <a:prstDash val="solid"/>
           </a:ln>
         </p:spPr>
+        <p:txBody>
+          <a:bodyPr/>
+          <a:lstStyle/>
+          <a:p>
+            <a:endParaRPr lang="en-US"/>
+          </a:p>
+        </p:txBody>
       </p:sp>
       <p:sp>
         <p:nvSpPr>
@@ -12165,7 +12997,7 @@
           </a:bodyPr>
           <a:lstStyle/>
           <a:p>
-            <a:pPr algn="ctr" indent="0" marL="0">
+            <a:pPr marL="0" indent="0" algn="ctr">
               <a:buNone/>
             </a:pPr>
             <a:r>
@@ -12204,7 +13036,7 @@
           <a:bodyPr wrap="square" lIns="0" tIns="0" rIns="0" bIns="0" rtlCol="0" anchor="ctr"/>
           <a:lstStyle/>
           <a:p>
-            <a:pPr algn="ctr" indent="0" marL="0">
+            <a:pPr marL="0" indent="0" algn="ctr">
               <a:buNone/>
             </a:pPr>
             <a:r>
@@ -12246,6 +13078,13 @@
             <a:prstDash val="solid"/>
           </a:ln>
         </p:spPr>
+        <p:txBody>
+          <a:bodyPr/>
+          <a:lstStyle/>
+          <a:p>
+            <a:endParaRPr lang="en-US"/>
+          </a:p>
+        </p:txBody>
       </p:sp>
       <p:sp>
         <p:nvSpPr>
@@ -12270,7 +13109,7 @@
           </a:bodyPr>
           <a:lstStyle/>
           <a:p>
-            <a:pPr algn="ctr" indent="0" marL="0">
+            <a:pPr marL="0" indent="0" algn="ctr">
               <a:buNone/>
             </a:pPr>
             <a:r>
@@ -12312,6 +13151,13 @@
             <a:tailEnd type="triangle"/>
           </a:ln>
         </p:spPr>
+        <p:txBody>
+          <a:bodyPr/>
+          <a:lstStyle/>
+          <a:p>
+            <a:endParaRPr lang="en-US"/>
+          </a:p>
+        </p:txBody>
       </p:sp>
       <p:sp>
         <p:nvSpPr>
@@ -12337,6 +13183,13 @@
             <a:prstDash val="solid"/>
           </a:ln>
         </p:spPr>
+        <p:txBody>
+          <a:bodyPr/>
+          <a:lstStyle/>
+          <a:p>
+            <a:endParaRPr lang="en-US"/>
+          </a:p>
+        </p:txBody>
       </p:sp>
       <p:sp>
         <p:nvSpPr>
@@ -12361,7 +13214,7 @@
           </a:bodyPr>
           <a:lstStyle/>
           <a:p>
-            <a:pPr algn="ctr" indent="0" marL="0">
+            <a:pPr marL="0" indent="0" algn="ctr">
               <a:buNone/>
             </a:pPr>
             <a:r>
@@ -12403,6 +13256,13 @@
             <a:tailEnd type="triangle"/>
           </a:ln>
         </p:spPr>
+        <p:txBody>
+          <a:bodyPr/>
+          <a:lstStyle/>
+          <a:p>
+            <a:endParaRPr lang="en-US"/>
+          </a:p>
+        </p:txBody>
       </p:sp>
       <p:sp>
         <p:nvSpPr>
@@ -12425,7 +13285,7 @@
           <a:bodyPr wrap="square" lIns="0" tIns="0" rIns="0" bIns="0" rtlCol="0" anchor="ctr"/>
           <a:lstStyle/>
           <a:p>
-            <a:pPr indent="0" marL="0">
+            <a:pPr marL="0" indent="0">
               <a:buNone/>
             </a:pPr>
             <a:r>
@@ -12467,6 +13327,13 @@
             <a:prstDash val="solid"/>
           </a:ln>
         </p:spPr>
+        <p:txBody>
+          <a:bodyPr/>
+          <a:lstStyle/>
+          <a:p>
+            <a:endParaRPr lang="en-US"/>
+          </a:p>
+        </p:txBody>
       </p:sp>
       <p:sp>
         <p:nvSpPr>
@@ -12491,7 +13358,7 @@
           </a:bodyPr>
           <a:lstStyle/>
           <a:p>
-            <a:pPr algn="ctr" indent="0" marL="0">
+            <a:pPr marL="0" indent="0" algn="ctr">
               <a:buNone/>
             </a:pPr>
             <a:r>
@@ -12533,6 +13400,13 @@
             <a:prstDash val="solid"/>
           </a:ln>
         </p:spPr>
+        <p:txBody>
+          <a:bodyPr/>
+          <a:lstStyle/>
+          <a:p>
+            <a:endParaRPr lang="en-US"/>
+          </a:p>
+        </p:txBody>
       </p:sp>
       <p:sp>
         <p:nvSpPr>
@@ -12558,6 +13432,13 @@
             <a:prstDash val="solid"/>
           </a:ln>
         </p:spPr>
+        <p:txBody>
+          <a:bodyPr/>
+          <a:lstStyle/>
+          <a:p>
+            <a:endParaRPr lang="en-US"/>
+          </a:p>
+        </p:txBody>
       </p:sp>
       <p:sp>
         <p:nvSpPr>
@@ -12582,7 +13463,7 @@
           </a:bodyPr>
           <a:lstStyle/>
           <a:p>
-            <a:pPr indent="0" marL="0">
+            <a:pPr marL="0" indent="0">
               <a:buNone/>
             </a:pPr>
             <a:r>
@@ -12619,11 +13500,11 @@
         </p:spPr>
         <p:txBody>
           <a:bodyPr wrap="square" lIns="0" tIns="0" rIns="0" bIns="0" rtlCol="0" anchor="t">
-            <a:normAutofit/>
+            <a:normAutofit fontScale="47500" lnSpcReduction="20000"/>
           </a:bodyPr>
           <a:lstStyle/>
           <a:p>
-            <a:pPr indent="0" marL="0">
+            <a:pPr marL="0" indent="0">
               <a:buNone/>
             </a:pPr>
             <a:r>
@@ -12643,7 +13524,7 @@
       </p:sp>
       <p:sp>
         <p:nvSpPr>
-          <p:cNvPr id="25" name="Slide Number Placeholder 0"/>
+          <p:cNvPr id="29" name="Slide Number Placeholder 0"/>
           <p:cNvSpPr>
             <a:spLocks noGrp="1"/>
           </p:cNvSpPr>
@@ -12661,7 +13542,7 @@
           </a:prstGeom>
           <a:extLst>
             <a:ext uri="{C572A759-6A51-4108-AA02-DFA0A04FC94B}">
-              <ma14:wrappingTextBoxFlag xmlns:ma14="http://schemas.microsoft.com/office/mac/drawingml/2011/main" val="0"/>
+              <ma14:wrappingTextBoxFlag xmlns:ma14="http://schemas.microsoft.com/office/mac/drawingml/2011/main" xmlns="" val="0"/>
             </a:ext>
           </a:extLst>
         </p:spPr>
@@ -12682,7 +13563,7 @@
           <a:p>
             <a:pPr algn="r"/>
             <a:fld id="{F7021451-1387-4CA6-816F-3879F97B5CBC}" type="slidenum">
-              <a:rPr b="0" lang="en-US"/>
+              <a:rPr lang="en-US" b="0"/>
               <a:t>6</a:t>
             </a:fld>
             <a:endParaRPr lang="en-US"/>
@@ -12737,7 +13618,7 @@
           </a:bodyPr>
           <a:lstStyle/>
           <a:p>
-            <a:pPr indent="0" marL="0">
+            <a:pPr marL="0" indent="0">
               <a:buNone/>
             </a:pPr>
             <a:r>
@@ -12778,7 +13659,7 @@
           </a:bodyPr>
           <a:lstStyle/>
           <a:p>
-            <a:pPr indent="0" marL="0">
+            <a:pPr marL="0" indent="0">
               <a:buNone/>
             </a:pPr>
             <a:r>
@@ -12798,14 +13679,14 @@
       </p:sp>
       <p:pic>
         <p:nvPicPr>
-          <p:cNvPr id="4" name="Image 0" descr="/mnt/data/week7_polyphase/assets/interpolation_savings.png">    </p:cNvPr>
+          <p:cNvPr id="4" name="Image 0" descr="/mnt/data/week7_polyphase/assets/interpolation_savings.png"/>
           <p:cNvPicPr>
             <a:picLocks noChangeAspect="1"/>
           </p:cNvPicPr>
           <p:nvPr/>
         </p:nvPicPr>
         <p:blipFill>
-          <a:blip r:embed="rId1"/>
+          <a:blip r:embed="rId3"/>
           <a:stretch>
             <a:fillRect/>
           </a:stretch>
@@ -12940,6 +13821,13 @@
             <a:prstDash val="solid"/>
           </a:ln>
         </p:spPr>
+        <p:txBody>
+          <a:bodyPr/>
+          <a:lstStyle/>
+          <a:p>
+            <a:endParaRPr lang="en-US"/>
+          </a:p>
+        </p:txBody>
       </p:sp>
       <p:sp>
         <p:nvSpPr>
@@ -12965,6 +13853,13 @@
             <a:prstDash val="solid"/>
           </a:ln>
         </p:spPr>
+        <p:txBody>
+          <a:bodyPr/>
+          <a:lstStyle/>
+          <a:p>
+            <a:endParaRPr lang="en-US"/>
+          </a:p>
+        </p:txBody>
       </p:sp>
       <p:sp>
         <p:nvSpPr>
@@ -12989,7 +13884,7 @@
           </a:bodyPr>
           <a:lstStyle/>
           <a:p>
-            <a:pPr indent="0" marL="0">
+            <a:pPr marL="0" indent="0">
               <a:buNone/>
             </a:pPr>
             <a:r>
@@ -13026,11 +13921,11 @@
         </p:spPr>
         <p:txBody>
           <a:bodyPr wrap="square" lIns="0" tIns="0" rIns="0" bIns="0" rtlCol="0" anchor="t">
-            <a:normAutofit/>
+            <a:normAutofit fontScale="92500" lnSpcReduction="20000"/>
           </a:bodyPr>
           <a:lstStyle/>
           <a:p>
-            <a:pPr indent="0" marL="0">
+            <a:pPr marL="0" indent="0">
               <a:buNone/>
             </a:pPr>
             <a:r>
@@ -13068,7 +13963,7 @@
           </a:prstGeom>
           <a:extLst>
             <a:ext uri="{C572A759-6A51-4108-AA02-DFA0A04FC94B}">
-              <ma14:wrappingTextBoxFlag xmlns:ma14="http://schemas.microsoft.com/office/mac/drawingml/2011/main" val="0"/>
+              <ma14:wrappingTextBoxFlag xmlns:ma14="http://schemas.microsoft.com/office/mac/drawingml/2011/main" xmlns="" val="0"/>
             </a:ext>
           </a:extLst>
         </p:spPr>
@@ -13089,7 +13984,7 @@
           <a:p>
             <a:pPr algn="r"/>
             <a:fld id="{F7021451-1387-4CA6-816F-3879F97B5CBC}" type="slidenum">
-              <a:rPr b="0" lang="en-US"/>
+              <a:rPr lang="en-US" b="0"/>
               <a:t>7</a:t>
             </a:fld>
             <a:endParaRPr lang="en-US"/>
@@ -13145,6 +14040,13 @@
             <a:prstDash val="solid"/>
           </a:ln>
         </p:spPr>
+        <p:txBody>
+          <a:bodyPr/>
+          <a:lstStyle/>
+          <a:p>
+            <a:endParaRPr lang="en-US"/>
+          </a:p>
+        </p:txBody>
       </p:sp>
       <p:sp>
         <p:nvSpPr>
@@ -13167,7 +14069,7 @@
           <a:bodyPr wrap="square" lIns="0" tIns="0" rIns="0" bIns="0" rtlCol="0" anchor="ctr"/>
           <a:lstStyle/>
           <a:p>
-            <a:pPr indent="0" marL="0">
+            <a:pPr marL="0" indent="0">
               <a:buNone/>
             </a:pPr>
             <a:r>
@@ -13204,11 +14106,11 @@
         </p:spPr>
         <p:txBody>
           <a:bodyPr wrap="square" lIns="0" tIns="0" rIns="0" bIns="0" rtlCol="0" anchor="ctr">
-            <a:normAutofit/>
+            <a:normAutofit fontScale="92500"/>
           </a:bodyPr>
           <a:lstStyle/>
           <a:p>
-            <a:pPr indent="0" marL="0">
+            <a:pPr marL="0" indent="0">
               <a:buNone/>
             </a:pPr>
             <a:r>
@@ -13223,86 +14125,6 @@
               <a:t>A 36-tap FIR interpolates by L = 4. Compared with a naive zero-stuff + full-rate FIR implementation, what ideal arithmetic saving should polyphase give?</a:t>
             </a:r>
             <a:endParaRPr lang="en-US" sz="2300" dirty="0"/>
-          </a:p>
-        </p:txBody>
-      </p:sp>
-      <p:sp>
-        <p:nvSpPr>
-          <p:cNvPr id="5" name="Text 3"/>
-          <p:cNvSpPr/>
-          <p:nvPr/>
-        </p:nvSpPr>
-        <p:spPr>
-          <a:xfrm>
-            <a:off x="1078992" y="3767328"/>
-            <a:ext cx="1188720" cy="228600"/>
-          </a:xfrm>
-          <a:prstGeom prst="rect">
-            <a:avLst/>
-          </a:prstGeom>
-          <a:noFill/>
-          <a:ln/>
-        </p:spPr>
-        <p:txBody>
-          <a:bodyPr wrap="square" lIns="0" tIns="0" rIns="0" bIns="0" rtlCol="0" anchor="ctr"/>
-          <a:lstStyle/>
-          <a:p>
-            <a:pPr indent="0" marL="0">
-              <a:buNone/>
-            </a:pPr>
-            <a:r>
-              <a:rPr lang="en-US" sz="1100" b="1" dirty="0">
-                <a:solidFill>
-                  <a:srgbClr val="2F855A"/>
-                </a:solidFill>
-                <a:latin typeface="Aptos" pitchFamily="34" charset="0"/>
-                <a:ea typeface="Aptos" pitchFamily="34" charset="-122"/>
-                <a:cs typeface="Aptos" pitchFamily="34" charset="-120"/>
-              </a:rPr>
-              <a:t>Good answer</a:t>
-            </a:r>
-            <a:endParaRPr lang="en-US" sz="1100" dirty="0"/>
-          </a:p>
-        </p:txBody>
-      </p:sp>
-      <p:sp>
-        <p:nvSpPr>
-          <p:cNvPr id="6" name="Text 4"/>
-          <p:cNvSpPr/>
-          <p:nvPr/>
-        </p:nvSpPr>
-        <p:spPr>
-          <a:xfrm>
-            <a:off x="1078992" y="4096512"/>
-            <a:ext cx="9784080" cy="1280160"/>
-          </a:xfrm>
-          <a:prstGeom prst="rect">
-            <a:avLst/>
-          </a:prstGeom>
-          <a:noFill/>
-          <a:ln/>
-        </p:spPr>
-        <p:txBody>
-          <a:bodyPr wrap="square" lIns="0" tIns="0" rIns="0" bIns="0" rtlCol="0" anchor="ctr">
-            <a:normAutofit/>
-          </a:bodyPr>
-          <a:lstStyle/>
-          <a:p>
-            <a:pPr indent="0" marL="0">
-              <a:buNone/>
-            </a:pPr>
-            <a:r>
-              <a:rPr lang="en-US" sz="1700" dirty="0">
-                <a:solidFill>
-                  <a:srgbClr val="1F2937"/>
-                </a:solidFill>
-                <a:latin typeface="Aptos" pitchFamily="34" charset="0"/>
-                <a:ea typeface="Aptos" pitchFamily="34" charset="-122"/>
-                <a:cs typeface="Aptos" pitchFamily="34" charset="-120"/>
-              </a:rPr>
-              <a:t>Approximately a factor of 4. The polyphase branches collectively perform about 36·Fₛ multiplies/s instead of about 36·4·Fₛ.</a:t>
-            </a:r>
-            <a:endParaRPr lang="en-US" sz="1700" dirty="0"/>
           </a:p>
         </p:txBody>
       </p:sp>
@@ -13326,7 +14148,7 @@
           </a:prstGeom>
           <a:extLst>
             <a:ext uri="{C572A759-6A51-4108-AA02-DFA0A04FC94B}">
-              <ma14:wrappingTextBoxFlag xmlns:ma14="http://schemas.microsoft.com/office/mac/drawingml/2011/main" val="0"/>
+              <ma14:wrappingTextBoxFlag xmlns:ma14="http://schemas.microsoft.com/office/mac/drawingml/2011/main" xmlns="" val="0"/>
             </a:ext>
           </a:extLst>
         </p:spPr>
@@ -13347,7 +14169,7 @@
           <a:p>
             <a:pPr algn="r"/>
             <a:fld id="{F7021451-1387-4CA6-816F-3879F97B5CBC}" type="slidenum">
-              <a:rPr b="0" lang="en-US"/>
+              <a:rPr lang="en-US" b="0"/>
               <a:t>8</a:t>
             </a:fld>
             <a:endParaRPr lang="en-US"/>
@@ -13364,17 +14186,16 @@
 
 <file path=ppt/slides/slide9.xml><?xml version="1.0" encoding="utf-8"?>
 <p:sld xmlns:a="http://schemas.openxmlformats.org/drawingml/2006/main" xmlns:r="http://schemas.openxmlformats.org/officeDocument/2006/relationships" xmlns:p="http://schemas.openxmlformats.org/presentationml/2006/main">
-  <p:cSld name="Slide 9">
-    <p:bg>
-      <p:bgPr>
-        <a:solidFill>
-          <a:srgbClr val="17324D"/>
-        </a:solidFill>
-      </p:bgPr>
-    </p:bg>
+  <p:cSld>
     <p:spTree>
       <p:nvGrpSpPr>
-        <p:cNvPr id="1" name=""/>
+        <p:cNvPr id="1" name="">
+          <a:extLst>
+            <a:ext uri="{FF2B5EF4-FFF2-40B4-BE49-F238E27FC236}">
+              <a16:creationId xmlns:a16="http://schemas.microsoft.com/office/drawing/2014/main" id="{B60D0207-1860-796F-8DFF-40B0A8917182}"/>
+            </a:ext>
+          </a:extLst>
+        </p:cNvPr>
         <p:cNvGrpSpPr/>
         <p:nvPr/>
       </p:nvGrpSpPr>
@@ -13388,14 +14209,58 @@
       </p:grpSpPr>
       <p:sp>
         <p:nvSpPr>
-          <p:cNvPr id="2" name="Text 0"/>
-          <p:cNvSpPr/>
-          <p:nvPr/>
-        </p:nvSpPr>
-        <p:spPr>
-          <a:xfrm>
-            <a:off x="658368" y="1097280"/>
-            <a:ext cx="1280160" cy="548640"/>
+          <p:cNvPr id="2" name="Shape 0">
+            <a:extLst>
+              <a:ext uri="{FF2B5EF4-FFF2-40B4-BE49-F238E27FC236}">
+                <a16:creationId xmlns:a16="http://schemas.microsoft.com/office/drawing/2014/main" id="{714596B0-2073-87F8-7BAC-F8B05ABB270C}"/>
+              </a:ext>
+            </a:extLst>
+          </p:cNvPr>
+          <p:cNvSpPr/>
+          <p:nvPr/>
+        </p:nvSpPr>
+        <p:spPr>
+          <a:xfrm>
+            <a:off x="822960" y="1417320"/>
+            <a:ext cx="10561320" cy="1874520"/>
+          </a:xfrm>
+          <a:prstGeom prst="roundRect">
+            <a:avLst/>
+          </a:prstGeom>
+          <a:solidFill>
+            <a:srgbClr val="FFF7ED"/>
+          </a:solidFill>
+          <a:ln w="15240">
+            <a:solidFill>
+              <a:srgbClr val="FED7AA"/>
+            </a:solidFill>
+            <a:prstDash val="solid"/>
+          </a:ln>
+        </p:spPr>
+        <p:txBody>
+          <a:bodyPr/>
+          <a:lstStyle/>
+          <a:p>
+            <a:endParaRPr lang="en-US"/>
+          </a:p>
+        </p:txBody>
+      </p:sp>
+      <p:sp>
+        <p:nvSpPr>
+          <p:cNvPr id="3" name="Text 1">
+            <a:extLst>
+              <a:ext uri="{FF2B5EF4-FFF2-40B4-BE49-F238E27FC236}">
+                <a16:creationId xmlns:a16="http://schemas.microsoft.com/office/drawing/2014/main" id="{9DAAACCF-2609-5398-BEDB-FFC7E5B95813}"/>
+              </a:ext>
+            </a:extLst>
+          </p:cNvPr>
+          <p:cNvSpPr/>
+          <p:nvPr/>
+        </p:nvSpPr>
+        <p:spPr>
+          <a:xfrm>
+            <a:off x="1078992" y="1664208"/>
+            <a:ext cx="2011680" cy="274320"/>
           </a:xfrm>
           <a:prstGeom prst="rect">
             <a:avLst/>
@@ -13407,34 +14272,132 @@
           <a:bodyPr wrap="square" lIns="0" tIns="0" rIns="0" bIns="0" rtlCol="0" anchor="ctr"/>
           <a:lstStyle/>
           <a:p>
-            <a:pPr indent="0" marL="0">
+            <a:pPr marL="0" indent="0">
               <a:buNone/>
             </a:pPr>
             <a:r>
-              <a:rPr lang="en-US" sz="3200" b="1" dirty="0">
-                <a:solidFill>
-                  <a:srgbClr val="78D6E0"/>
-                </a:solidFill>
-                <a:latin typeface="Aptos" pitchFamily="34" charset="0"/>
-                <a:ea typeface="Aptos" pitchFamily="34" charset="-122"/>
-                <a:cs typeface="Aptos" pitchFamily="34" charset="-120"/>
-              </a:rPr>
-              <a:t>02</a:t>
-            </a:r>
-            <a:endParaRPr lang="en-US" sz="3200" dirty="0"/>
-          </a:p>
-        </p:txBody>
-      </p:sp>
-      <p:sp>
-        <p:nvSpPr>
-          <p:cNvPr id="3" name="Text 1"/>
-          <p:cNvSpPr/>
-          <p:nvPr/>
-        </p:nvSpPr>
-        <p:spPr>
-          <a:xfrm>
-            <a:off x="658368" y="1874520"/>
-            <a:ext cx="10515600" cy="960120"/>
+              <a:rPr lang="en-US" sz="1200" b="1" dirty="0">
+                <a:solidFill>
+                  <a:srgbClr val="D97706"/>
+                </a:solidFill>
+                <a:latin typeface="Aptos" pitchFamily="34" charset="0"/>
+                <a:ea typeface="Aptos" pitchFamily="34" charset="-122"/>
+                <a:cs typeface="Aptos" pitchFamily="34" charset="-120"/>
+              </a:rPr>
+              <a:t>CONCEPT CHECK</a:t>
+            </a:r>
+            <a:endParaRPr lang="en-US" sz="1200" dirty="0"/>
+          </a:p>
+        </p:txBody>
+      </p:sp>
+      <p:sp>
+        <p:nvSpPr>
+          <p:cNvPr id="4" name="Text 2">
+            <a:extLst>
+              <a:ext uri="{FF2B5EF4-FFF2-40B4-BE49-F238E27FC236}">
+                <a16:creationId xmlns:a16="http://schemas.microsoft.com/office/drawing/2014/main" id="{149E1F75-AE7D-3C92-CD4D-3D6C6D569F36}"/>
+              </a:ext>
+            </a:extLst>
+          </p:cNvPr>
+          <p:cNvSpPr/>
+          <p:nvPr/>
+        </p:nvSpPr>
+        <p:spPr>
+          <a:xfrm>
+            <a:off x="1078992" y="2084832"/>
+            <a:ext cx="9966960" cy="868680"/>
+          </a:xfrm>
+          <a:prstGeom prst="rect">
+            <a:avLst/>
+          </a:prstGeom>
+          <a:noFill/>
+          <a:ln/>
+        </p:spPr>
+        <p:txBody>
+          <a:bodyPr wrap="square" lIns="0" tIns="0" rIns="0" bIns="0" rtlCol="0" anchor="ctr">
+            <a:normAutofit fontScale="92500"/>
+          </a:bodyPr>
+          <a:lstStyle/>
+          <a:p>
+            <a:pPr marL="0" indent="0">
+              <a:buNone/>
+            </a:pPr>
+            <a:r>
+              <a:rPr lang="en-US" sz="2300" b="1" dirty="0">
+                <a:solidFill>
+                  <a:srgbClr val="17324D"/>
+                </a:solidFill>
+                <a:latin typeface="Aptos" pitchFamily="34" charset="0"/>
+                <a:ea typeface="Aptos" pitchFamily="34" charset="-122"/>
+                <a:cs typeface="Aptos" pitchFamily="34" charset="-120"/>
+              </a:rPr>
+              <a:t>A 36-tap FIR interpolates by L = 4. Compared with a naive zero-stuff + full-rate FIR implementation, what ideal arithmetic saving should polyphase give?</a:t>
+            </a:r>
+            <a:endParaRPr lang="en-US" sz="2300" dirty="0"/>
+          </a:p>
+        </p:txBody>
+      </p:sp>
+      <p:sp>
+        <p:nvSpPr>
+          <p:cNvPr id="5" name="Text 3">
+            <a:extLst>
+              <a:ext uri="{FF2B5EF4-FFF2-40B4-BE49-F238E27FC236}">
+                <a16:creationId xmlns:a16="http://schemas.microsoft.com/office/drawing/2014/main" id="{74E975AD-4961-3A19-D1C1-B9B0749D5A8E}"/>
+              </a:ext>
+            </a:extLst>
+          </p:cNvPr>
+          <p:cNvSpPr/>
+          <p:nvPr/>
+        </p:nvSpPr>
+        <p:spPr>
+          <a:xfrm>
+            <a:off x="1078992" y="3767328"/>
+            <a:ext cx="1188720" cy="228600"/>
+          </a:xfrm>
+          <a:prstGeom prst="rect">
+            <a:avLst/>
+          </a:prstGeom>
+          <a:noFill/>
+          <a:ln/>
+        </p:spPr>
+        <p:txBody>
+          <a:bodyPr wrap="square" lIns="0" tIns="0" rIns="0" bIns="0" rtlCol="0" anchor="ctr"/>
+          <a:lstStyle/>
+          <a:p>
+            <a:pPr marL="0" indent="0">
+              <a:buNone/>
+            </a:pPr>
+            <a:r>
+              <a:rPr lang="en-US" sz="1100" b="1" dirty="0">
+                <a:solidFill>
+                  <a:srgbClr val="2F855A"/>
+                </a:solidFill>
+                <a:latin typeface="Aptos" pitchFamily="34" charset="0"/>
+                <a:ea typeface="Aptos" pitchFamily="34" charset="-122"/>
+                <a:cs typeface="Aptos" pitchFamily="34" charset="-120"/>
+              </a:rPr>
+              <a:t>Good answer</a:t>
+            </a:r>
+            <a:endParaRPr lang="en-US" sz="1100" dirty="0"/>
+          </a:p>
+        </p:txBody>
+      </p:sp>
+      <p:sp>
+        <p:nvSpPr>
+          <p:cNvPr id="6" name="Text 4">
+            <a:extLst>
+              <a:ext uri="{FF2B5EF4-FFF2-40B4-BE49-F238E27FC236}">
+                <a16:creationId xmlns:a16="http://schemas.microsoft.com/office/drawing/2014/main" id="{92806BD5-FDFF-2FD0-A084-360620FC70A5}"/>
+              </a:ext>
+            </a:extLst>
+          </p:cNvPr>
+          <p:cNvSpPr/>
+          <p:nvPr/>
+        </p:nvSpPr>
+        <p:spPr>
+          <a:xfrm>
+            <a:off x="1078992" y="4096512"/>
+            <a:ext cx="9784080" cy="1280160"/>
           </a:xfrm>
           <a:prstGeom prst="rect">
             <a:avLst/>
@@ -13448,66 +14411,33 @@
           </a:bodyPr>
           <a:lstStyle/>
           <a:p>
-            <a:pPr indent="0" marL="0">
+            <a:pPr marL="0" indent="0">
               <a:buNone/>
             </a:pPr>
             <a:r>
-              <a:rPr lang="en-US" sz="3400" b="1" dirty="0">
-                <a:solidFill>
-                  <a:srgbClr val="FFFFFF"/>
-                </a:solidFill>
-                <a:latin typeface="Aptos" pitchFamily="34" charset="0"/>
-                <a:ea typeface="Aptos" pitchFamily="34" charset="-122"/>
-                <a:cs typeface="Aptos" pitchFamily="34" charset="-120"/>
-              </a:rPr>
-              <a:t>Two-channel filter banks</a:t>
-            </a:r>
-            <a:endParaRPr lang="en-US" sz="3400" dirty="0"/>
-          </a:p>
-        </p:txBody>
-      </p:sp>
-      <p:sp>
-        <p:nvSpPr>
-          <p:cNvPr id="4" name="Text 2"/>
-          <p:cNvSpPr/>
-          <p:nvPr/>
-        </p:nvSpPr>
-        <p:spPr>
-          <a:xfrm>
-            <a:off x="676656" y="3017520"/>
-            <a:ext cx="9875520" cy="457200"/>
-          </a:xfrm>
-          <a:prstGeom prst="rect">
-            <a:avLst/>
-          </a:prstGeom>
-          <a:noFill/>
-          <a:ln/>
-        </p:spPr>
-        <p:txBody>
-          <a:bodyPr wrap="square" lIns="0" tIns="0" rIns="0" bIns="0" rtlCol="0" anchor="ctr"/>
-          <a:lstStyle/>
-          <a:p>
-            <a:pPr indent="0" marL="0">
-              <a:buNone/>
-            </a:pPr>
-            <a:r>
-              <a:rPr lang="en-US" sz="1600" dirty="0">
-                <a:solidFill>
-                  <a:srgbClr val="D6EAF0"/>
-                </a:solidFill>
-                <a:latin typeface="Aptos" pitchFamily="34" charset="0"/>
-                <a:ea typeface="Aptos" pitchFamily="34" charset="-122"/>
-                <a:cs typeface="Aptos" pitchFamily="34" charset="-120"/>
-              </a:rPr>
-              <a:t>Split the signal into subbands, reduce each rate, then combine them again.</a:t>
-            </a:r>
-            <a:endParaRPr lang="en-US" sz="1600" dirty="0"/>
-          </a:p>
-        </p:txBody>
-      </p:sp>
-      <p:sp>
-        <p:nvSpPr>
-          <p:cNvPr id="25" name="Slide Number Placeholder 0"/>
+              <a:rPr lang="en-US" sz="1700" dirty="0">
+                <a:solidFill>
+                  <a:srgbClr val="1F2937"/>
+                </a:solidFill>
+                <a:latin typeface="Aptos" pitchFamily="34" charset="0"/>
+                <a:ea typeface="Aptos" pitchFamily="34" charset="-122"/>
+                <a:cs typeface="Aptos" pitchFamily="34" charset="-120"/>
+              </a:rPr>
+              <a:t>Approximately a factor of 4. The polyphase branches collectively perform about 36·Fₛ multiplies/s instead of about 36·4·Fₛ.</a:t>
+            </a:r>
+            <a:endParaRPr lang="en-US" sz="1700" dirty="0"/>
+          </a:p>
+        </p:txBody>
+      </p:sp>
+      <p:sp>
+        <p:nvSpPr>
+          <p:cNvPr id="25" name="Slide Number Placeholder 0">
+            <a:extLst>
+              <a:ext uri="{FF2B5EF4-FFF2-40B4-BE49-F238E27FC236}">
+                <a16:creationId xmlns:a16="http://schemas.microsoft.com/office/drawing/2014/main" id="{E0F58D92-57EF-E2C8-6F3D-1B2533552EE1}"/>
+              </a:ext>
+            </a:extLst>
+          </p:cNvPr>
           <p:cNvSpPr>
             <a:spLocks noGrp="1"/>
           </p:cNvSpPr>
@@ -13525,7 +14455,7 @@
           </a:prstGeom>
           <a:extLst>
             <a:ext uri="{C572A759-6A51-4108-AA02-DFA0A04FC94B}">
-              <ma14:wrappingTextBoxFlag xmlns:ma14="http://schemas.microsoft.com/office/mac/drawingml/2011/main" val="0"/>
+              <ma14:wrappingTextBoxFlag xmlns="" xmlns:ma14="http://schemas.microsoft.com/office/mac/drawingml/2011/main" val="0"/>
             </a:ext>
           </a:extLst>
         </p:spPr>
@@ -13546,7 +14476,7 @@
           <a:p>
             <a:pPr algn="r"/>
             <a:fld id="{F7021451-1387-4CA6-816F-3879F97B5CBC}" type="slidenum">
-              <a:rPr b="0" lang="en-US"/>
+              <a:rPr lang="en-US" b="0"/>
               <a:t>9</a:t>
             </a:fld>
             <a:endParaRPr lang="en-US"/>
@@ -13554,6 +14484,11 @@
         </p:txBody>
       </p:sp>
     </p:spTree>
+    <p:extLst>
+      <p:ext uri="{BB962C8B-B14F-4D97-AF65-F5344CB8AC3E}">
+        <p14:creationId xmlns:p14="http://schemas.microsoft.com/office/powerpoint/2010/main" val="2417433300"/>
+      </p:ext>
+    </p:extLst>
   </p:cSld>
   <p:clrMapOvr>
     <a:masterClrMapping/>
@@ -13854,4 +14789,319 @@
     </a:ext>
   </a:extLst>
 </a:theme>
+</file>
+
+<file path=ppt/theme/theme2.xml><?xml version="1.0" encoding="utf-8"?>
+<a:theme xmlns:a="http://schemas.openxmlformats.org/drawingml/2006/main" name="Office Theme">
+  <a:themeElements>
+    <a:clrScheme name="Office">
+      <a:dk1>
+        <a:sysClr val="windowText" lastClr="000000"/>
+      </a:dk1>
+      <a:lt1>
+        <a:sysClr val="window" lastClr="FFFFFF"/>
+      </a:lt1>
+      <a:dk2>
+        <a:srgbClr val="0E2841"/>
+      </a:dk2>
+      <a:lt2>
+        <a:srgbClr val="E8E8E8"/>
+      </a:lt2>
+      <a:accent1>
+        <a:srgbClr val="156082"/>
+      </a:accent1>
+      <a:accent2>
+        <a:srgbClr val="E97132"/>
+      </a:accent2>
+      <a:accent3>
+        <a:srgbClr val="196B24"/>
+      </a:accent3>
+      <a:accent4>
+        <a:srgbClr val="0F9ED5"/>
+      </a:accent4>
+      <a:accent5>
+        <a:srgbClr val="A02B93"/>
+      </a:accent5>
+      <a:accent6>
+        <a:srgbClr val="4EA72E"/>
+      </a:accent6>
+      <a:hlink>
+        <a:srgbClr val="467886"/>
+      </a:hlink>
+      <a:folHlink>
+        <a:srgbClr val="96607D"/>
+      </a:folHlink>
+    </a:clrScheme>
+    <a:fontScheme name="Office">
+      <a:majorFont>
+        <a:latin typeface="Aptos Display" panose="02110004020202020204"/>
+        <a:ea typeface=""/>
+        <a:cs typeface=""/>
+        <a:font script="Jpan" typeface="游ゴシック Light"/>
+        <a:font script="Hang" typeface="맑은 고딕"/>
+        <a:font script="Hans" typeface="等线 Light"/>
+        <a:font script="Hant" typeface="新細明體"/>
+        <a:font script="Arab" typeface="Times New Roman"/>
+        <a:font script="Hebr" typeface="Times New Roman"/>
+        <a:font script="Thai" typeface="Angsana New"/>
+        <a:font script="Ethi" typeface="Nyala"/>
+        <a:font script="Beng" typeface="Vrinda"/>
+        <a:font script="Gujr" typeface="Shruti"/>
+        <a:font script="Khmr" typeface="MoolBoran"/>
+        <a:font script="Knda" typeface="Tunga"/>
+        <a:font script="Guru" typeface="Raavi"/>
+        <a:font script="Cans" typeface="Euphemia"/>
+        <a:font script="Cher" typeface="Plantagenet Cherokee"/>
+        <a:font script="Yiii" typeface="Microsoft Yi Baiti"/>
+        <a:font script="Tibt" typeface="Microsoft Himalaya"/>
+        <a:font script="Thaa" typeface="MV Boli"/>
+        <a:font script="Deva" typeface="Mangal"/>
+        <a:font script="Telu" typeface="Gautami"/>
+        <a:font script="Taml" typeface="Latha"/>
+        <a:font script="Syrc" typeface="Estrangelo Edessa"/>
+        <a:font script="Orya" typeface="Kalinga"/>
+        <a:font script="Mlym" typeface="Kartika"/>
+        <a:font script="Laoo" typeface="DokChampa"/>
+        <a:font script="Sinh" typeface="Iskoola Pota"/>
+        <a:font script="Mong" typeface="Mongolian Baiti"/>
+        <a:font script="Viet" typeface="Times New Roman"/>
+        <a:font script="Uigh" typeface="Microsoft Uighur"/>
+        <a:font script="Geor" typeface="Sylfaen"/>
+        <a:font script="Armn" typeface="Arial"/>
+        <a:font script="Bugi" typeface="Leelawadee UI"/>
+        <a:font script="Bopo" typeface="Microsoft JhengHei"/>
+        <a:font script="Java" typeface="Javanese Text"/>
+        <a:font script="Lisu" typeface="Segoe UI"/>
+        <a:font script="Mymr" typeface="Myanmar Text"/>
+        <a:font script="Nkoo" typeface="Ebrima"/>
+        <a:font script="Olck" typeface="Nirmala UI"/>
+        <a:font script="Osma" typeface="Ebrima"/>
+        <a:font script="Phag" typeface="Phagspa"/>
+        <a:font script="Syrn" typeface="Estrangelo Edessa"/>
+        <a:font script="Syrj" typeface="Estrangelo Edessa"/>
+        <a:font script="Syre" typeface="Estrangelo Edessa"/>
+        <a:font script="Sora" typeface="Nirmala UI"/>
+        <a:font script="Tale" typeface="Microsoft Tai Le"/>
+        <a:font script="Talu" typeface="Microsoft New Tai Lue"/>
+        <a:font script="Tfng" typeface="Ebrima"/>
+      </a:majorFont>
+      <a:minorFont>
+        <a:latin typeface="Aptos" panose="02110004020202020204"/>
+        <a:ea typeface=""/>
+        <a:cs typeface=""/>
+        <a:font script="Jpan" typeface="游ゴシック"/>
+        <a:font script="Hang" typeface="맑은 고딕"/>
+        <a:font script="Hans" typeface="等线"/>
+        <a:font script="Hant" typeface="新細明體"/>
+        <a:font script="Arab" typeface="Arial"/>
+        <a:font script="Hebr" typeface="Arial"/>
+        <a:font script="Thai" typeface="Cordia New"/>
+        <a:font script="Ethi" typeface="Nyala"/>
+        <a:font script="Beng" typeface="Vrinda"/>
+        <a:font script="Gujr" typeface="Shruti"/>
+        <a:font script="Khmr" typeface="DaunPenh"/>
+        <a:font script="Knda" typeface="Tunga"/>
+        <a:font script="Guru" typeface="Raavi"/>
+        <a:font script="Cans" typeface="Euphemia"/>
+        <a:font script="Cher" typeface="Plantagenet Cherokee"/>
+        <a:font script="Yiii" typeface="Microsoft Yi Baiti"/>
+        <a:font script="Tibt" typeface="Microsoft Himalaya"/>
+        <a:font script="Thaa" typeface="MV Boli"/>
+        <a:font script="Deva" typeface="Mangal"/>
+        <a:font script="Telu" typeface="Gautami"/>
+        <a:font script="Taml" typeface="Latha"/>
+        <a:font script="Syrc" typeface="Estrangelo Edessa"/>
+        <a:font script="Orya" typeface="Kalinga"/>
+        <a:font script="Mlym" typeface="Kartika"/>
+        <a:font script="Laoo" typeface="DokChampa"/>
+        <a:font script="Sinh" typeface="Iskoola Pota"/>
+        <a:font script="Mong" typeface="Mongolian Baiti"/>
+        <a:font script="Viet" typeface="Arial"/>
+        <a:font script="Uigh" typeface="Microsoft Uighur"/>
+        <a:font script="Geor" typeface="Sylfaen"/>
+        <a:font script="Armn" typeface="Arial"/>
+        <a:font script="Bugi" typeface="Leelawadee UI"/>
+        <a:font script="Bopo" typeface="Microsoft JhengHei"/>
+        <a:font script="Java" typeface="Javanese Text"/>
+        <a:font script="Lisu" typeface="Segoe UI"/>
+        <a:font script="Mymr" typeface="Myanmar Text"/>
+        <a:font script="Nkoo" typeface="Ebrima"/>
+        <a:font script="Olck" typeface="Nirmala UI"/>
+        <a:font script="Osma" typeface="Ebrima"/>
+        <a:font script="Phag" typeface="Phagspa"/>
+        <a:font script="Syrn" typeface="Estrangelo Edessa"/>
+        <a:font script="Syrj" typeface="Estrangelo Edessa"/>
+        <a:font script="Syre" typeface="Estrangelo Edessa"/>
+        <a:font script="Sora" typeface="Nirmala UI"/>
+        <a:font script="Tale" typeface="Microsoft Tai Le"/>
+        <a:font script="Talu" typeface="Microsoft New Tai Lue"/>
+        <a:font script="Tfng" typeface="Ebrima"/>
+      </a:minorFont>
+    </a:fontScheme>
+    <a:fmtScheme name="Office">
+      <a:fillStyleLst>
+        <a:solidFill>
+          <a:schemeClr val="phClr"/>
+        </a:solidFill>
+        <a:gradFill rotWithShape="1">
+          <a:gsLst>
+            <a:gs pos="0">
+              <a:schemeClr val="phClr">
+                <a:lumMod val="110000"/>
+                <a:satMod val="105000"/>
+                <a:tint val="67000"/>
+              </a:schemeClr>
+            </a:gs>
+            <a:gs pos="50000">
+              <a:schemeClr val="phClr">
+                <a:lumMod val="105000"/>
+                <a:satMod val="103000"/>
+                <a:tint val="73000"/>
+              </a:schemeClr>
+            </a:gs>
+            <a:gs pos="100000">
+              <a:schemeClr val="phClr">
+                <a:lumMod val="105000"/>
+                <a:satMod val="109000"/>
+                <a:tint val="81000"/>
+              </a:schemeClr>
+            </a:gs>
+          </a:gsLst>
+          <a:lin ang="5400000" scaled="0"/>
+        </a:gradFill>
+        <a:gradFill rotWithShape="1">
+          <a:gsLst>
+            <a:gs pos="0">
+              <a:schemeClr val="phClr">
+                <a:satMod val="103000"/>
+                <a:lumMod val="102000"/>
+                <a:tint val="94000"/>
+              </a:schemeClr>
+            </a:gs>
+            <a:gs pos="50000">
+              <a:schemeClr val="phClr">
+                <a:satMod val="110000"/>
+                <a:lumMod val="100000"/>
+                <a:shade val="100000"/>
+              </a:schemeClr>
+            </a:gs>
+            <a:gs pos="100000">
+              <a:schemeClr val="phClr">
+                <a:lumMod val="99000"/>
+                <a:satMod val="120000"/>
+                <a:shade val="78000"/>
+              </a:schemeClr>
+            </a:gs>
+          </a:gsLst>
+          <a:lin ang="5400000" scaled="0"/>
+        </a:gradFill>
+      </a:fillStyleLst>
+      <a:lnStyleLst>
+        <a:ln w="12700" cap="flat" cmpd="sng" algn="ctr">
+          <a:solidFill>
+            <a:schemeClr val="phClr"/>
+          </a:solidFill>
+          <a:prstDash val="solid"/>
+          <a:miter lim="800000"/>
+        </a:ln>
+        <a:ln w="19050" cap="flat" cmpd="sng" algn="ctr">
+          <a:solidFill>
+            <a:schemeClr val="phClr"/>
+          </a:solidFill>
+          <a:prstDash val="solid"/>
+          <a:miter lim="800000"/>
+        </a:ln>
+        <a:ln w="25400" cap="flat" cmpd="sng" algn="ctr">
+          <a:solidFill>
+            <a:schemeClr val="phClr"/>
+          </a:solidFill>
+          <a:prstDash val="solid"/>
+          <a:miter lim="800000"/>
+        </a:ln>
+      </a:lnStyleLst>
+      <a:effectStyleLst>
+        <a:effectStyle>
+          <a:effectLst/>
+        </a:effectStyle>
+        <a:effectStyle>
+          <a:effectLst/>
+        </a:effectStyle>
+        <a:effectStyle>
+          <a:effectLst>
+            <a:outerShdw blurRad="57150" dist="19050" dir="5400000" algn="ctr" rotWithShape="0">
+              <a:srgbClr val="000000">
+                <a:alpha val="63000"/>
+              </a:srgbClr>
+            </a:outerShdw>
+          </a:effectLst>
+        </a:effectStyle>
+      </a:effectStyleLst>
+      <a:bgFillStyleLst>
+        <a:solidFill>
+          <a:schemeClr val="phClr"/>
+        </a:solidFill>
+        <a:solidFill>
+          <a:schemeClr val="phClr">
+            <a:tint val="95000"/>
+            <a:satMod val="170000"/>
+          </a:schemeClr>
+        </a:solidFill>
+        <a:gradFill rotWithShape="1">
+          <a:gsLst>
+            <a:gs pos="0">
+              <a:schemeClr val="phClr">
+                <a:tint val="93000"/>
+                <a:satMod val="150000"/>
+                <a:shade val="98000"/>
+                <a:lumMod val="102000"/>
+              </a:schemeClr>
+            </a:gs>
+            <a:gs pos="50000">
+              <a:schemeClr val="phClr">
+                <a:tint val="98000"/>
+                <a:satMod val="130000"/>
+                <a:shade val="90000"/>
+                <a:lumMod val="103000"/>
+              </a:schemeClr>
+            </a:gs>
+            <a:gs pos="100000">
+              <a:schemeClr val="phClr">
+                <a:shade val="63000"/>
+                <a:satMod val="120000"/>
+              </a:schemeClr>
+            </a:gs>
+          </a:gsLst>
+          <a:lin ang="5400000" scaled="0"/>
+        </a:gradFill>
+      </a:bgFillStyleLst>
+    </a:fmtScheme>
+  </a:themeElements>
+  <a:objectDefaults>
+    <a:lnDef>
+      <a:spPr/>
+      <a:bodyPr/>
+      <a:lstStyle/>
+      <a:style>
+        <a:lnRef idx="2">
+          <a:schemeClr val="accent1"/>
+        </a:lnRef>
+        <a:fillRef idx="0">
+          <a:schemeClr val="accent1"/>
+        </a:fillRef>
+        <a:effectRef idx="1">
+          <a:schemeClr val="accent1"/>
+        </a:effectRef>
+        <a:fontRef idx="minor">
+          <a:schemeClr val="tx1"/>
+        </a:fontRef>
+      </a:style>
+    </a:lnDef>
+  </a:objectDefaults>
+  <a:extraClrSchemeLst/>
+  <a:extLst>
+    <a:ext uri="{05A4C25C-085E-4340-85A3-A5531E510DB2}">
+      <thm15:themeFamily xmlns:thm15="http://schemas.microsoft.com/office/thememl/2012/main" name="Office Theme" id="{2E142A2C-CD16-42D6-873A-C26D2A0506FA}" vid="{1BDDFF52-6CD6-40A5-AB3C-68EB2F1E4D0A}"/>
+    </a:ext>
+  </a:extLst>
+</a:theme>
 </file>